--- a/session2/session2_full.pptx
+++ b/session2/session2_full.pptx
@@ -1988,17 +1988,18 @@
               <a:buNone/>
             </a:pPr>
             <a:r>
-              <a:rPr lang="en-US" sz="1100" dirty="0">
-                <a:solidFill>
-                  <a:srgbClr val="CADCFC"/>
-                </a:solidFill>
-                <a:latin typeface="Arial" pitchFamily="34" charset="0"/>
-                <a:ea typeface="Arial" pitchFamily="34" charset="-122"/>
-                <a:cs typeface="Arial" pitchFamily="34" charset="-120"/>
-              </a:rPr>
-              <a:t>Koji</a:t>
-            </a:r>
-            <a:endParaRPr lang="en-US" sz="1100" dirty="0"/>
+              <a:rPr lang="ja-JP" altLang="en-US" sz="1100">
+                <a:solidFill>
+                  <a:schemeClr val="bg1"/>
+                </a:solidFill>
+              </a:rPr>
+              <a:t>土田　晃司</a:t>
+            </a:r>
+            <a:endParaRPr lang="en-US" sz="1100" dirty="0">
+              <a:solidFill>
+                <a:schemeClr val="bg1"/>
+              </a:solidFill>
+            </a:endParaRPr>
           </a:p>
         </p:txBody>
       </p:sp>

--- a/session2/session2_full.pptx
+++ b/session2/session2_full.pptx
@@ -9,6 +9,7 @@
   </p:notesMasterIdLst>
   <p:sldIdLst>
     <p:sldId id="256" r:id="rId2"/>
+    <p:sldId id="269" r:id="rId20"/>
     <p:sldId id="257" r:id="rId3"/>
     <p:sldId id="258" r:id="rId4"/>
     <p:sldId id="259" r:id="rId5"/>
@@ -1845,6 +1846,10 @@
             <a:prstDash val="solid"/>
           </a:ln>
         </p:spPr>
+        <p:txBody>
+          <a:bodyPr/>
+          <a:p/>
+        </p:txBody>
       </p:sp>
       <p:sp>
         <p:nvSpPr>
@@ -2000,6 +2005,39 @@
                 <a:schemeClr val="bg1"/>
               </a:solidFill>
             </a:endParaRPr>
+          </a:p>
+        </p:txBody>
+      </p:sp>
+      <p:sp>
+        <p:nvSpPr>
+          <p:cNvPr id="11" name="TextBox 10"/>
+          <p:cNvSpPr txBox="1"/>
+          <p:nvPr/>
+        </p:nvSpPr>
+        <p:spPr>
+          <a:xfrm>
+            <a:off x="457200" y="4280000"/>
+            <a:ext cx="8229600" cy="290000"/>
+          </a:xfrm>
+          <a:prstGeom prst="rect">
+            <a:avLst/>
+          </a:prstGeom>
+          <a:noFill/>
+        </p:spPr>
+        <p:txBody>
+          <a:bodyPr wrap="square" lIns="0" rIns="0" tIns="0" bIns="0">
+            <a:spAutoFit/>
+          </a:bodyPr>
+          <a:lstStyle/>
+          <a:p>
+            <a:r>
+              <a:rPr sz="1500" b="1">
+                <a:solidFill>
+                  <a:srgbClr val="FFC800"/>
+                </a:solidFill>
+              </a:rPr>
+              <a:t>★ 覚えて帰る一言: 「迷ったらDevContainerから始める」</a:t>
+            </a:r>
           </a:p>
         </p:txBody>
       </p:sp>
@@ -2012,6 +2050,999 @@
 </file>
 
 <file path=ppt/slides/slide10.xml><?xml version="1.0" encoding="utf-8"?>
+<p:sld xmlns:a="http://schemas.openxmlformats.org/drawingml/2006/main" xmlns:r="http://schemas.openxmlformats.org/officeDocument/2006/relationships" xmlns:p="http://schemas.openxmlformats.org/presentationml/2006/main">
+  <p:cSld name="Slide 9">
+    <p:bg>
+      <p:bgPr>
+        <a:solidFill>
+          <a:srgbClr val="FFFFFF"/>
+        </a:solidFill>
+        <a:effectLst/>
+      </p:bgPr>
+    </p:bg>
+    <p:spTree>
+      <p:nvGrpSpPr>
+        <p:cNvPr id="1" name=""/>
+        <p:cNvGrpSpPr/>
+        <p:nvPr/>
+      </p:nvGrpSpPr>
+      <p:grpSpPr>
+        <a:xfrm>
+          <a:off x="0" y="0"/>
+          <a:ext cx="0" cy="0"/>
+          <a:chOff x="0" y="0"/>
+          <a:chExt cx="0" cy="0"/>
+        </a:xfrm>
+      </p:grpSpPr>
+      <p:sp>
+        <p:nvSpPr>
+          <p:cNvPr id="2" name="Text 0"/>
+          <p:cNvSpPr/>
+          <p:nvPr/>
+        </p:nvSpPr>
+        <p:spPr>
+          <a:xfrm>
+            <a:off x="457200" y="320040"/>
+            <a:ext cx="8229600" cy="548640"/>
+          </a:xfrm>
+          <a:prstGeom prst="rect">
+            <a:avLst/>
+          </a:prstGeom>
+          <a:noFill/>
+          <a:ln/>
+        </p:spPr>
+        <p:txBody>
+          <a:bodyPr wrap="square" lIns="0" tIns="0" rIns="0" bIns="0" rtlCol="0" anchor="ctr"/>
+          <a:lstStyle/>
+          <a:p>
+            <a:pPr marL="0" indent="0">
+              <a:buNone/>
+            </a:pPr>
+            <a:r>
+              <a:rPr lang="en-US" sz="2600" b="1" dirty="0">
+                <a:solidFill>
+                  <a:srgbClr val="1E2761"/>
+                </a:solidFill>
+                <a:latin typeface="Arial Black" pitchFamily="34" charset="0"/>
+                <a:ea typeface="Arial Black" pitchFamily="34" charset="-122"/>
+                <a:cs typeface="Arial Black" pitchFamily="34" charset="-120"/>
+              </a:rPr>
+              <a:t>あなたはどの環境で動かすべきか</a:t>
+            </a:r>
+            <a:endParaRPr lang="en-US" sz="2600" dirty="0"/>
+          </a:p>
+        </p:txBody>
+      </p:sp>
+      <p:sp>
+        <p:nvSpPr>
+          <p:cNvPr id="3" name="Shape 1"/>
+          <p:cNvSpPr/>
+          <p:nvPr/>
+        </p:nvSpPr>
+        <p:spPr>
+          <a:xfrm>
+            <a:off x="457200" y="932688"/>
+            <a:ext cx="548640" cy="45720"/>
+          </a:xfrm>
+          <a:prstGeom prst="rect">
+            <a:avLst/>
+          </a:prstGeom>
+          <a:solidFill>
+            <a:srgbClr val="F96167"/>
+          </a:solidFill>
+          <a:ln w="12700">
+            <a:solidFill>
+              <a:srgbClr val="F96167"/>
+            </a:solidFill>
+            <a:prstDash val="solid"/>
+          </a:ln>
+        </p:spPr>
+        <p:txBody>
+          <a:bodyPr/>
+          <a:p/>
+        </p:txBody>
+      </p:sp>
+      <p:sp>
+        <p:nvSpPr>
+          <p:cNvPr id="4" name="Text 2"/>
+          <p:cNvSpPr/>
+          <p:nvPr/>
+        </p:nvSpPr>
+        <p:spPr>
+          <a:xfrm>
+            <a:off x="457200" y="1051560"/>
+            <a:ext cx="8229600" cy="274320"/>
+          </a:xfrm>
+          <a:prstGeom prst="rect">
+            <a:avLst/>
+          </a:prstGeom>
+          <a:noFill/>
+          <a:ln/>
+        </p:spPr>
+        <p:txBody>
+          <a:bodyPr wrap="square" lIns="0" tIns="0" rIns="0" bIns="0" rtlCol="0" anchor="ctr"/>
+          <a:lstStyle/>
+          <a:p>
+            <a:pPr marL="0" indent="0">
+              <a:buNone/>
+            </a:pPr>
+            <a:r>
+              <a:rPr lang="en-US" sz="1300" i="1" dirty="0">
+                <a:solidFill>
+                  <a:srgbClr val="64748B"/>
+                </a:solidFill>
+                <a:latin typeface="Meiryo" pitchFamily="34" charset="0"/>
+                <a:ea typeface="Meiryo" pitchFamily="34" charset="-122"/>
+                <a:cs typeface="Meiryo" pitchFamily="34" charset="-120"/>
+              </a:rPr>
+              <a:t>迷ったら DevContainer。ここから始めて必要に応じてスケールアップ</a:t>
+            </a:r>
+            <a:endParaRPr lang="en-US" sz="1300" dirty="0"/>
+          </a:p>
+        </p:txBody>
+      </p:sp>
+      <p:sp>
+        <p:nvSpPr>
+          <p:cNvPr id="5" name="Shape 3"/>
+          <p:cNvSpPr/>
+          <p:nvPr/>
+        </p:nvSpPr>
+        <p:spPr>
+          <a:xfrm>
+            <a:off x="3200400" y="1417320"/>
+            <a:ext cx="2743200" cy="457200"/>
+          </a:xfrm>
+          <a:prstGeom prst="rect">
+            <a:avLst/>
+          </a:prstGeom>
+          <a:solidFill>
+            <a:srgbClr val="1E2761"/>
+          </a:solidFill>
+          <a:ln w="12700">
+            <a:solidFill>
+              <a:srgbClr val="1E2761"/>
+            </a:solidFill>
+            <a:prstDash val="solid"/>
+          </a:ln>
+        </p:spPr>
+        <p:txBody>
+          <a:bodyPr/>
+          <a:p/>
+        </p:txBody>
+      </p:sp>
+      <p:sp>
+        <p:nvSpPr>
+          <p:cNvPr id="6" name="Text 4"/>
+          <p:cNvSpPr/>
+          <p:nvPr/>
+        </p:nvSpPr>
+        <p:spPr>
+          <a:xfrm>
+            <a:off x="3200400" y="1417320"/>
+            <a:ext cx="2743200" cy="457200"/>
+          </a:xfrm>
+          <a:prstGeom prst="rect">
+            <a:avLst/>
+          </a:prstGeom>
+          <a:noFill/>
+          <a:ln/>
+        </p:spPr>
+        <p:txBody>
+          <a:bodyPr wrap="square" lIns="0" tIns="0" rIns="0" bIns="0" rtlCol="0" anchor="ctr"/>
+          <a:lstStyle/>
+          <a:p>
+            <a:pPr marL="0" indent="0" algn="ctr">
+              <a:buNone/>
+            </a:pPr>
+            <a:r>
+              <a:rPr lang="en-US" sz="1200" b="1" dirty="0">
+                <a:solidFill>
+                  <a:srgbClr val="FFFFFF"/>
+                </a:solidFill>
+                <a:latin typeface="Meiryo" pitchFamily="34" charset="0"/>
+                <a:ea typeface="Meiryo" pitchFamily="34" charset="-122"/>
+                <a:cs typeface="Meiryo" pitchFamily="34" charset="-120"/>
+              </a:rPr>
+              <a:t>Q1: 業務で機密情報を扱う？</a:t>
+            </a:r>
+            <a:endParaRPr lang="en-US" sz="1200" dirty="0"/>
+          </a:p>
+        </p:txBody>
+      </p:sp>
+      <p:sp>
+        <p:nvSpPr>
+          <p:cNvPr id="7" name="Shape 5"/>
+          <p:cNvSpPr/>
+          <p:nvPr/>
+        </p:nvSpPr>
+        <p:spPr>
+          <a:xfrm>
+            <a:off x="457200" y="2606040"/>
+            <a:ext cx="2743200" cy="457200"/>
+          </a:xfrm>
+          <a:prstGeom prst="rect">
+            <a:avLst/>
+          </a:prstGeom>
+          <a:solidFill>
+            <a:srgbClr val="1E2761"/>
+          </a:solidFill>
+          <a:ln w="12700">
+            <a:solidFill>
+              <a:srgbClr val="1E2761"/>
+            </a:solidFill>
+            <a:prstDash val="solid"/>
+          </a:ln>
+        </p:spPr>
+        <p:txBody>
+          <a:bodyPr/>
+          <a:p/>
+        </p:txBody>
+      </p:sp>
+      <p:sp>
+        <p:nvSpPr>
+          <p:cNvPr id="8" name="Text 6"/>
+          <p:cNvSpPr/>
+          <p:nvPr/>
+        </p:nvSpPr>
+        <p:spPr>
+          <a:xfrm>
+            <a:off x="457200" y="2606040"/>
+            <a:ext cx="2743200" cy="457200"/>
+          </a:xfrm>
+          <a:prstGeom prst="rect">
+            <a:avLst/>
+          </a:prstGeom>
+          <a:noFill/>
+          <a:ln/>
+        </p:spPr>
+        <p:txBody>
+          <a:bodyPr wrap="square" lIns="0" tIns="0" rIns="0" bIns="0" rtlCol="0" anchor="ctr"/>
+          <a:lstStyle/>
+          <a:p>
+            <a:pPr marL="0" indent="0" algn="ctr">
+              <a:buNone/>
+            </a:pPr>
+            <a:r>
+              <a:rPr lang="en-US" sz="1200" b="1" dirty="0">
+                <a:solidFill>
+                  <a:srgbClr val="FFFFFF"/>
+                </a:solidFill>
+                <a:latin typeface="Meiryo" pitchFamily="34" charset="0"/>
+                <a:ea typeface="Meiryo" pitchFamily="34" charset="-122"/>
+                <a:cs typeface="Meiryo" pitchFamily="34" charset="-120"/>
+              </a:rPr>
+              <a:t>Q2: 規制業界（金融/医療）？</a:t>
+            </a:r>
+            <a:endParaRPr lang="en-US" sz="1200" dirty="0"/>
+          </a:p>
+        </p:txBody>
+      </p:sp>
+      <p:sp>
+        <p:nvSpPr>
+          <p:cNvPr id="9" name="Shape 7"/>
+          <p:cNvSpPr/>
+          <p:nvPr/>
+        </p:nvSpPr>
+        <p:spPr>
+          <a:xfrm>
+            <a:off x="4572000" y="1874520"/>
+            <a:ext cx="0" cy="228600"/>
+          </a:xfrm>
+          <a:prstGeom prst="line">
+            <a:avLst/>
+          </a:prstGeom>
+          <a:noFill/>
+          <a:ln w="25400">
+            <a:solidFill>
+              <a:srgbClr val="1E2761"/>
+            </a:solidFill>
+            <a:prstDash val="solid"/>
+          </a:ln>
+        </p:spPr>
+        <p:txBody>
+          <a:bodyPr/>
+          <a:p/>
+        </p:txBody>
+      </p:sp>
+      <p:sp>
+        <p:nvSpPr>
+          <p:cNvPr id="10" name="Shape 8"/>
+          <p:cNvSpPr/>
+          <p:nvPr/>
+        </p:nvSpPr>
+        <p:spPr>
+          <a:xfrm>
+            <a:off x="1828800" y="2103120"/>
+            <a:ext cx="5486400" cy="0"/>
+          </a:xfrm>
+          <a:prstGeom prst="line">
+            <a:avLst/>
+          </a:prstGeom>
+          <a:noFill/>
+          <a:ln w="25400">
+            <a:solidFill>
+              <a:srgbClr val="1E2761"/>
+            </a:solidFill>
+            <a:prstDash val="solid"/>
+          </a:ln>
+        </p:spPr>
+        <p:txBody>
+          <a:bodyPr/>
+          <a:p/>
+        </p:txBody>
+      </p:sp>
+      <p:sp>
+        <p:nvSpPr>
+          <p:cNvPr id="11" name="Shape 9"/>
+          <p:cNvSpPr/>
+          <p:nvPr/>
+        </p:nvSpPr>
+        <p:spPr>
+          <a:xfrm>
+            <a:off x="1828800" y="2103120"/>
+            <a:ext cx="0" cy="502920"/>
+          </a:xfrm>
+          <a:prstGeom prst="line">
+            <a:avLst/>
+          </a:prstGeom>
+          <a:noFill/>
+          <a:ln w="25400">
+            <a:solidFill>
+              <a:srgbClr val="1E2761"/>
+            </a:solidFill>
+            <a:prstDash val="solid"/>
+          </a:ln>
+        </p:spPr>
+        <p:txBody>
+          <a:bodyPr/>
+          <a:p/>
+        </p:txBody>
+      </p:sp>
+      <p:sp>
+        <p:nvSpPr>
+          <p:cNvPr id="12" name="Text 10"/>
+          <p:cNvSpPr/>
+          <p:nvPr/>
+        </p:nvSpPr>
+        <p:spPr>
+          <a:xfrm>
+            <a:off x="1463040" y="1874520"/>
+            <a:ext cx="548640" cy="201168"/>
+          </a:xfrm>
+          <a:prstGeom prst="rect">
+            <a:avLst/>
+          </a:prstGeom>
+          <a:noFill/>
+          <a:ln/>
+        </p:spPr>
+        <p:txBody>
+          <a:bodyPr wrap="square" lIns="0" tIns="0" rIns="0" bIns="0" rtlCol="0" anchor="ctr"/>
+          <a:lstStyle/>
+          <a:p>
+            <a:pPr marL="0" indent="0" algn="ctr">
+              <a:buNone/>
+            </a:pPr>
+            <a:r>
+              <a:rPr lang="en-US" sz="1000" b="1" dirty="0">
+                <a:solidFill>
+                  <a:srgbClr val="F96167"/>
+                </a:solidFill>
+                <a:latin typeface="Arial Black" pitchFamily="34" charset="0"/>
+                <a:ea typeface="Arial Black" pitchFamily="34" charset="-122"/>
+                <a:cs typeface="Arial Black" pitchFamily="34" charset="-120"/>
+              </a:rPr>
+              <a:t>YES</a:t>
+            </a:r>
+            <a:endParaRPr lang="en-US" sz="1000" dirty="0"/>
+          </a:p>
+        </p:txBody>
+      </p:sp>
+      <p:sp>
+        <p:nvSpPr>
+          <p:cNvPr id="13" name="Text 11"/>
+          <p:cNvSpPr/>
+          <p:nvPr/>
+        </p:nvSpPr>
+        <p:spPr>
+          <a:xfrm>
+            <a:off x="7040880" y="1874520"/>
+            <a:ext cx="548640" cy="201168"/>
+          </a:xfrm>
+          <a:prstGeom prst="rect">
+            <a:avLst/>
+          </a:prstGeom>
+          <a:noFill/>
+          <a:ln/>
+        </p:spPr>
+        <p:txBody>
+          <a:bodyPr wrap="square" lIns="0" tIns="0" rIns="0" bIns="0" rtlCol="0" anchor="ctr"/>
+          <a:lstStyle/>
+          <a:p>
+            <a:pPr marL="0" indent="0" algn="ctr">
+              <a:buNone/>
+            </a:pPr>
+            <a:r>
+              <a:rPr lang="en-US" sz="1000" b="1" dirty="0">
+                <a:solidFill>
+                  <a:srgbClr val="2E8B57"/>
+                </a:solidFill>
+                <a:latin typeface="Arial Black" pitchFamily="34" charset="0"/>
+                <a:ea typeface="Arial Black" pitchFamily="34" charset="-122"/>
+                <a:cs typeface="Arial Black" pitchFamily="34" charset="-120"/>
+              </a:rPr>
+              <a:t>NO</a:t>
+            </a:r>
+            <a:endParaRPr lang="en-US" sz="1000" dirty="0"/>
+          </a:p>
+        </p:txBody>
+      </p:sp>
+      <p:sp>
+        <p:nvSpPr>
+          <p:cNvPr id="14" name="Shape 12"/>
+          <p:cNvSpPr/>
+          <p:nvPr/>
+        </p:nvSpPr>
+        <p:spPr>
+          <a:xfrm>
+            <a:off x="1828800" y="3063240"/>
+            <a:ext cx="0" cy="274320"/>
+          </a:xfrm>
+          <a:prstGeom prst="line">
+            <a:avLst/>
+          </a:prstGeom>
+          <a:noFill/>
+          <a:ln w="25400">
+            <a:solidFill>
+              <a:srgbClr val="1E2761"/>
+            </a:solidFill>
+            <a:prstDash val="solid"/>
+          </a:ln>
+        </p:spPr>
+        <p:txBody>
+          <a:bodyPr/>
+          <a:p/>
+        </p:txBody>
+      </p:sp>
+      <p:sp>
+        <p:nvSpPr>
+          <p:cNvPr id="15" name="Shape 13"/>
+          <p:cNvSpPr/>
+          <p:nvPr/>
+        </p:nvSpPr>
+        <p:spPr>
+          <a:xfrm>
+            <a:off x="1280160" y="3337560"/>
+            <a:ext cx="1920240" cy="0"/>
+          </a:xfrm>
+          <a:prstGeom prst="line">
+            <a:avLst/>
+          </a:prstGeom>
+          <a:noFill/>
+          <a:ln w="25400">
+            <a:solidFill>
+              <a:srgbClr val="1E2761"/>
+            </a:solidFill>
+            <a:prstDash val="solid"/>
+          </a:ln>
+        </p:spPr>
+        <p:txBody>
+          <a:bodyPr/>
+          <a:p/>
+        </p:txBody>
+      </p:sp>
+      <p:sp>
+        <p:nvSpPr>
+          <p:cNvPr id="16" name="Shape 14"/>
+          <p:cNvSpPr/>
+          <p:nvPr/>
+        </p:nvSpPr>
+        <p:spPr>
+          <a:xfrm>
+            <a:off x="1280160" y="3337560"/>
+            <a:ext cx="0" cy="548640"/>
+          </a:xfrm>
+          <a:prstGeom prst="line">
+            <a:avLst/>
+          </a:prstGeom>
+          <a:noFill/>
+          <a:ln w="25400">
+            <a:solidFill>
+              <a:srgbClr val="1E2761"/>
+            </a:solidFill>
+            <a:prstDash val="solid"/>
+          </a:ln>
+        </p:spPr>
+        <p:txBody>
+          <a:bodyPr/>
+          <a:p/>
+        </p:txBody>
+      </p:sp>
+      <p:sp>
+        <p:nvSpPr>
+          <p:cNvPr id="17" name="Shape 15"/>
+          <p:cNvSpPr/>
+          <p:nvPr/>
+        </p:nvSpPr>
+        <p:spPr>
+          <a:xfrm>
+            <a:off x="3200400" y="3337560"/>
+            <a:ext cx="0" cy="548640"/>
+          </a:xfrm>
+          <a:prstGeom prst="line">
+            <a:avLst/>
+          </a:prstGeom>
+          <a:noFill/>
+          <a:ln w="25400">
+            <a:solidFill>
+              <a:srgbClr val="1E2761"/>
+            </a:solidFill>
+            <a:prstDash val="solid"/>
+          </a:ln>
+        </p:spPr>
+        <p:txBody>
+          <a:bodyPr/>
+          <a:p/>
+        </p:txBody>
+      </p:sp>
+      <p:sp>
+        <p:nvSpPr>
+          <p:cNvPr id="18" name="Text 16"/>
+          <p:cNvSpPr/>
+          <p:nvPr/>
+        </p:nvSpPr>
+        <p:spPr>
+          <a:xfrm>
+            <a:off x="960120" y="3136392"/>
+            <a:ext cx="548640" cy="182880"/>
+          </a:xfrm>
+          <a:prstGeom prst="rect">
+            <a:avLst/>
+          </a:prstGeom>
+          <a:noFill/>
+          <a:ln/>
+        </p:spPr>
+        <p:txBody>
+          <a:bodyPr wrap="square" lIns="0" tIns="0" rIns="0" bIns="0" rtlCol="0" anchor="ctr"/>
+          <a:lstStyle/>
+          <a:p>
+            <a:pPr marL="0" indent="0" algn="ctr">
+              <a:buNone/>
+            </a:pPr>
+            <a:r>
+              <a:rPr lang="en-US" sz="900" b="1" dirty="0">
+                <a:solidFill>
+                  <a:srgbClr val="F96167"/>
+                </a:solidFill>
+                <a:latin typeface="Arial Black" pitchFamily="34" charset="0"/>
+                <a:ea typeface="Arial Black" pitchFamily="34" charset="-122"/>
+                <a:cs typeface="Arial Black" pitchFamily="34" charset="-120"/>
+              </a:rPr>
+              <a:t>YES</a:t>
+            </a:r>
+            <a:endParaRPr lang="en-US" sz="900" dirty="0"/>
+          </a:p>
+        </p:txBody>
+      </p:sp>
+      <p:sp>
+        <p:nvSpPr>
+          <p:cNvPr id="19" name="Text 17"/>
+          <p:cNvSpPr/>
+          <p:nvPr/>
+        </p:nvSpPr>
+        <p:spPr>
+          <a:xfrm>
+            <a:off x="2926080" y="3136392"/>
+            <a:ext cx="548640" cy="182880"/>
+          </a:xfrm>
+          <a:prstGeom prst="rect">
+            <a:avLst/>
+          </a:prstGeom>
+          <a:noFill/>
+          <a:ln/>
+        </p:spPr>
+        <p:txBody>
+          <a:bodyPr wrap="square" lIns="0" tIns="0" rIns="0" bIns="0" rtlCol="0" anchor="ctr"/>
+          <a:lstStyle/>
+          <a:p>
+            <a:pPr marL="0" indent="0" algn="ctr">
+              <a:buNone/>
+            </a:pPr>
+            <a:r>
+              <a:rPr lang="en-US" sz="900" b="1" dirty="0">
+                <a:solidFill>
+                  <a:srgbClr val="2E8B57"/>
+                </a:solidFill>
+                <a:latin typeface="Arial Black" pitchFamily="34" charset="0"/>
+                <a:ea typeface="Arial Black" pitchFamily="34" charset="-122"/>
+                <a:cs typeface="Arial Black" pitchFamily="34" charset="-120"/>
+              </a:rPr>
+              <a:t>NO</a:t>
+            </a:r>
+            <a:endParaRPr lang="en-US" sz="900" dirty="0"/>
+          </a:p>
+        </p:txBody>
+      </p:sp>
+      <p:sp>
+        <p:nvSpPr>
+          <p:cNvPr id="20" name="Shape 18"/>
+          <p:cNvSpPr/>
+          <p:nvPr/>
+        </p:nvSpPr>
+        <p:spPr>
+          <a:xfrm>
+            <a:off x="7315200" y="2103120"/>
+            <a:ext cx="0" cy="1783080"/>
+          </a:xfrm>
+          <a:prstGeom prst="line">
+            <a:avLst/>
+          </a:prstGeom>
+          <a:noFill/>
+          <a:ln w="25400">
+            <a:solidFill>
+              <a:srgbClr val="1E2761"/>
+            </a:solidFill>
+            <a:prstDash val="solid"/>
+          </a:ln>
+        </p:spPr>
+        <p:txBody>
+          <a:bodyPr/>
+          <a:p/>
+        </p:txBody>
+      </p:sp>
+      <p:sp>
+        <p:nvSpPr>
+          <p:cNvPr id="21" name="Shape 19"/>
+          <p:cNvSpPr/>
+          <p:nvPr/>
+        </p:nvSpPr>
+        <p:spPr>
+          <a:xfrm>
+            <a:off x="457200" y="3886200"/>
+            <a:ext cx="1645920" cy="777240"/>
+          </a:xfrm>
+          <a:prstGeom prst="rect">
+            <a:avLst/>
+          </a:prstGeom>
+          <a:solidFill>
+            <a:srgbClr val="F96167"/>
+          </a:solidFill>
+          <a:ln w="12700">
+            <a:solidFill>
+              <a:srgbClr val="F96167"/>
+            </a:solidFill>
+            <a:prstDash val="solid"/>
+          </a:ln>
+        </p:spPr>
+        <p:txBody>
+          <a:bodyPr/>
+          <a:p/>
+        </p:txBody>
+      </p:sp>
+      <p:sp>
+        <p:nvSpPr>
+          <p:cNvPr id="22" name="Text 20"/>
+          <p:cNvSpPr/>
+          <p:nvPr/>
+        </p:nvSpPr>
+        <p:spPr>
+          <a:xfrm>
+            <a:off x="457200" y="3886200"/>
+            <a:ext cx="1645920" cy="777240"/>
+          </a:xfrm>
+          <a:prstGeom prst="rect">
+            <a:avLst/>
+          </a:prstGeom>
+          <a:noFill/>
+          <a:ln/>
+        </p:spPr>
+        <p:txBody>
+          <a:bodyPr wrap="square" lIns="0" tIns="0" rIns="0" bIns="0" rtlCol="0" anchor="ctr"/>
+          <a:lstStyle/>
+          <a:p>
+            <a:pPr marL="0" indent="0" algn="ctr">
+              <a:buNone/>
+            </a:pPr>
+            <a:r>
+              <a:rPr lang="en-US" sz="1300" b="1" dirty="0">
+                <a:solidFill>
+                  <a:srgbClr val="FFFFFF"/>
+                </a:solidFill>
+                <a:latin typeface="Meiryo" pitchFamily="34" charset="0"/>
+                <a:ea typeface="Meiryo" pitchFamily="34" charset="-122"/>
+                <a:cs typeface="Meiryo" pitchFamily="34" charset="-120"/>
+              </a:rPr>
+              <a:t>L4: 別端末</a:t>
+            </a:r>
+            <a:endParaRPr lang="en-US" sz="1300" dirty="0"/>
+          </a:p>
+          <a:p>
+            <a:pPr marL="0" indent="0" algn="ctr">
+              <a:buNone/>
+            </a:pPr>
+            <a:r>
+              <a:rPr lang="en-US" sz="1000" dirty="0">
+                <a:solidFill>
+                  <a:srgbClr val="FFFFFF"/>
+                </a:solidFill>
+                <a:latin typeface="Meiryo" pitchFamily="34" charset="0"/>
+                <a:ea typeface="Meiryo" pitchFamily="34" charset="-122"/>
+                <a:cs typeface="Meiryo" pitchFamily="34" charset="-120"/>
+              </a:rPr>
+              <a:t>(Mac mini等)</a:t>
+            </a:r>
+            <a:endParaRPr lang="en-US" sz="1300" dirty="0"/>
+          </a:p>
+        </p:txBody>
+      </p:sp>
+      <p:sp>
+        <p:nvSpPr>
+          <p:cNvPr id="23" name="Shape 21"/>
+          <p:cNvSpPr/>
+          <p:nvPr/>
+        </p:nvSpPr>
+        <p:spPr>
+          <a:xfrm>
+            <a:off x="2377440" y="3886200"/>
+            <a:ext cx="1645920" cy="777240"/>
+          </a:xfrm>
+          <a:prstGeom prst="rect">
+            <a:avLst/>
+          </a:prstGeom>
+          <a:solidFill>
+            <a:srgbClr val="1E2761"/>
+          </a:solidFill>
+          <a:ln w="12700">
+            <a:solidFill>
+              <a:srgbClr val="1E2761"/>
+            </a:solidFill>
+            <a:prstDash val="solid"/>
+          </a:ln>
+        </p:spPr>
+        <p:txBody>
+          <a:bodyPr/>
+          <a:p/>
+        </p:txBody>
+      </p:sp>
+      <p:sp>
+        <p:nvSpPr>
+          <p:cNvPr id="24" name="Text 22"/>
+          <p:cNvSpPr/>
+          <p:nvPr/>
+        </p:nvSpPr>
+        <p:spPr>
+          <a:xfrm>
+            <a:off x="2377440" y="3886200"/>
+            <a:ext cx="1645920" cy="777240"/>
+          </a:xfrm>
+          <a:prstGeom prst="rect">
+            <a:avLst/>
+          </a:prstGeom>
+          <a:noFill/>
+          <a:ln/>
+        </p:spPr>
+        <p:txBody>
+          <a:bodyPr wrap="square" lIns="0" tIns="0" rIns="0" bIns="0" rtlCol="0" anchor="ctr"/>
+          <a:lstStyle/>
+          <a:p>
+            <a:pPr marL="0" indent="0" algn="ctr">
+              <a:buNone/>
+            </a:pPr>
+            <a:r>
+              <a:rPr lang="en-US" sz="1300" b="1" dirty="0">
+                <a:solidFill>
+                  <a:srgbClr val="FFFFFF"/>
+                </a:solidFill>
+                <a:latin typeface="Meiryo" pitchFamily="34" charset="0"/>
+                <a:ea typeface="Meiryo" pitchFamily="34" charset="-122"/>
+                <a:cs typeface="Meiryo" pitchFamily="34" charset="-120"/>
+              </a:rPr>
+              <a:t>DevContainer ★</a:t>
+            </a:r>
+            <a:endParaRPr lang="en-US" sz="1300" dirty="0"/>
+          </a:p>
+          <a:p>
+            <a:pPr marL="0" indent="0" algn="ctr">
+              <a:buNone/>
+            </a:pPr>
+            <a:r>
+              <a:rPr lang="en-US" sz="1000" dirty="0">
+                <a:solidFill>
+                  <a:srgbClr val="CADCFC"/>
+                </a:solidFill>
+                <a:latin typeface="Meiryo" pitchFamily="34" charset="0"/>
+                <a:ea typeface="Meiryo" pitchFamily="34" charset="-122"/>
+                <a:cs typeface="Meiryo" pitchFamily="34" charset="-120"/>
+              </a:rPr>
+              <a:t>(基本線)</a:t>
+            </a:r>
+            <a:endParaRPr lang="en-US" sz="1300" dirty="0"/>
+          </a:p>
+        </p:txBody>
+      </p:sp>
+      <p:sp>
+        <p:nvSpPr>
+          <p:cNvPr id="25" name="Shape 23"/>
+          <p:cNvSpPr/>
+          <p:nvPr/>
+        </p:nvSpPr>
+        <p:spPr>
+          <a:xfrm>
+            <a:off x="6126480" y="3886200"/>
+            <a:ext cx="2377440" cy="777240"/>
+          </a:xfrm>
+          <a:prstGeom prst="rect">
+            <a:avLst/>
+          </a:prstGeom>
+          <a:solidFill>
+            <a:srgbClr val="2E8B57"/>
+          </a:solidFill>
+          <a:ln w="12700">
+            <a:solidFill>
+              <a:srgbClr val="2E8B57"/>
+            </a:solidFill>
+            <a:prstDash val="solid"/>
+          </a:ln>
+        </p:spPr>
+        <p:txBody>
+          <a:bodyPr/>
+          <a:p/>
+        </p:txBody>
+      </p:sp>
+      <p:sp>
+        <p:nvSpPr>
+          <p:cNvPr id="26" name="Text 24"/>
+          <p:cNvSpPr/>
+          <p:nvPr/>
+        </p:nvSpPr>
+        <p:spPr>
+          <a:xfrm>
+            <a:off x="6126480" y="3886200"/>
+            <a:ext cx="2377440" cy="777240"/>
+          </a:xfrm>
+          <a:prstGeom prst="rect">
+            <a:avLst/>
+          </a:prstGeom>
+          <a:noFill/>
+          <a:ln/>
+        </p:spPr>
+        <p:txBody>
+          <a:bodyPr wrap="square" lIns="0" tIns="0" rIns="0" bIns="0" rtlCol="0" anchor="ctr"/>
+          <a:lstStyle/>
+          <a:p>
+            <a:pPr marL="0" indent="0" algn="ctr">
+              <a:buNone/>
+            </a:pPr>
+            <a:r>
+              <a:rPr lang="en-US" sz="1300" b="1" dirty="0">
+                <a:solidFill>
+                  <a:srgbClr val="FFFFFF"/>
+                </a:solidFill>
+                <a:latin typeface="Meiryo" pitchFamily="34" charset="0"/>
+                <a:ea typeface="Meiryo" pitchFamily="34" charset="-122"/>
+                <a:cs typeface="Meiryo" pitchFamily="34" charset="-120"/>
+              </a:rPr>
+              <a:t>ローカル直接でOK</a:t>
+            </a:r>
+            <a:endParaRPr lang="en-US" sz="1300" dirty="0"/>
+          </a:p>
+          <a:p>
+            <a:pPr marL="0" indent="0" algn="ctr">
+              <a:buNone/>
+            </a:pPr>
+            <a:r>
+              <a:rPr lang="en-US" sz="1000" dirty="0">
+                <a:solidFill>
+                  <a:srgbClr val="FFFFFF"/>
+                </a:solidFill>
+                <a:latin typeface="Meiryo" pitchFamily="34" charset="0"/>
+                <a:ea typeface="Meiryo" pitchFamily="34" charset="-122"/>
+                <a:cs typeface="Meiryo" pitchFamily="34" charset="-120"/>
+              </a:rPr>
+              <a:t>+ 第3回の3点セット</a:t>
+            </a:r>
+            <a:endParaRPr lang="en-US" sz="1300" dirty="0"/>
+          </a:p>
+        </p:txBody>
+      </p:sp>
+      <p:sp>
+        <p:nvSpPr>
+          <p:cNvPr id="27" name="Shape 25"/>
+          <p:cNvSpPr/>
+          <p:nvPr/>
+        </p:nvSpPr>
+        <p:spPr>
+          <a:xfrm>
+            <a:off x="457200" y="4754880"/>
+            <a:ext cx="8229600" cy="365760"/>
+          </a:xfrm>
+          <a:prstGeom prst="rect">
+            <a:avLst/>
+          </a:prstGeom>
+          <a:solidFill>
+            <a:srgbClr val="151B47"/>
+          </a:solidFill>
+          <a:ln w="12700">
+            <a:solidFill>
+              <a:srgbClr val="151B47"/>
+            </a:solidFill>
+            <a:prstDash val="solid"/>
+          </a:ln>
+        </p:spPr>
+        <p:txBody>
+          <a:bodyPr/>
+          <a:p/>
+        </p:txBody>
+      </p:sp>
+      <p:sp>
+        <p:nvSpPr>
+          <p:cNvPr id="28" name="Text 26"/>
+          <p:cNvSpPr/>
+          <p:nvPr/>
+        </p:nvSpPr>
+        <p:spPr>
+          <a:xfrm>
+            <a:off x="594360" y="4754880"/>
+            <a:ext cx="7955280" cy="365760"/>
+          </a:xfrm>
+          <a:prstGeom prst="rect">
+            <a:avLst/>
+          </a:prstGeom>
+          <a:noFill/>
+          <a:ln/>
+        </p:spPr>
+        <p:txBody>
+          <a:bodyPr wrap="square" lIns="0" tIns="0" rIns="0" bIns="0" rtlCol="0" anchor="ctr"/>
+          <a:lstStyle/>
+          <a:p>
+            <a:pPr marL="0" indent="0">
+              <a:buNone/>
+            </a:pPr>
+            <a:r>
+              <a:rPr lang="en-US" sz="1200" dirty="0">
+                <a:solidFill>
+                  <a:srgbClr val="FFFFFF"/>
+                </a:solidFill>
+                <a:latin typeface="Meiryo" pitchFamily="34" charset="0"/>
+                <a:ea typeface="Meiryo" pitchFamily="34" charset="-122"/>
+                <a:cs typeface="Meiryo" pitchFamily="34" charset="-120"/>
+              </a:rPr>
+              <a:t>💡 </a:t>
+            </a:r>
+            <a:r>
+              <a:rPr lang="en-US" sz="1100" b="1" dirty="0">
+                <a:solidFill>
+                  <a:srgbClr val="FFFFFF"/>
+                </a:solidFill>
+                <a:latin typeface="Meiryo" pitchFamily="34" charset="0"/>
+                <a:ea typeface="Meiryo" pitchFamily="34" charset="-122"/>
+                <a:cs typeface="Meiryo" pitchFamily="34" charset="-120"/>
+              </a:rPr>
+              <a:t>迷ったら DevContainer</a:t>
+            </a:r>
+            <a:r>
+              <a:rPr lang="en-US" sz="1100" dirty="0">
+                <a:solidFill>
+                  <a:srgbClr val="CADCFC"/>
+                </a:solidFill>
+                <a:latin typeface="Meiryo" pitchFamily="34" charset="0"/>
+                <a:ea typeface="Meiryo" pitchFamily="34" charset="-122"/>
+                <a:cs typeface="Meiryo" pitchFamily="34" charset="-120"/>
+              </a:rPr>
+              <a:t>。そこから、必要に応じてスケールアップ or ダウンするのが実用的</a:t>
+            </a:r>
+            <a:endParaRPr lang="en-US" sz="1100" dirty="0"/>
+          </a:p>
+        </p:txBody>
+      </p:sp>
+    </p:spTree>
+  </p:cSld>
+  <p:clrMapOvr>
+    <a:masterClrMapping/>
+  </p:clrMapOvr>
+</p:sld>
+</file>
+
+<file path=ppt/slides/slide11.xml><?xml version="1.0" encoding="utf-8"?>
 <p:sld xmlns:a="http://schemas.openxmlformats.org/drawingml/2006/main" xmlns:r="http://schemas.openxmlformats.org/officeDocument/2006/relationships" xmlns:p="http://schemas.openxmlformats.org/presentationml/2006/main">
   <p:cSld name="Slide 10">
     <p:bg>
@@ -2177,6 +3208,10 @@
             <a:prstDash val="solid"/>
           </a:ln>
         </p:spPr>
+        <p:txBody>
+          <a:bodyPr/>
+          <a:p/>
+        </p:txBody>
       </p:sp>
       <p:sp>
         <p:nvSpPr>
@@ -2202,6 +3237,10 @@
             <a:prstDash val="solid"/>
           </a:ln>
         </p:spPr>
+        <p:txBody>
+          <a:bodyPr/>
+          <a:p/>
+        </p:txBody>
       </p:sp>
       <p:sp>
         <p:nvSpPr>
@@ -2355,6 +3394,10 @@
             <a:prstDash val="solid"/>
           </a:ln>
         </p:spPr>
+        <p:txBody>
+          <a:bodyPr/>
+          <a:p/>
+        </p:txBody>
       </p:sp>
       <p:sp>
         <p:nvSpPr>
@@ -2419,6 +3462,10 @@
             <a:prstDash val="solid"/>
           </a:ln>
         </p:spPr>
+        <p:txBody>
+          <a:bodyPr/>
+          <a:p/>
+        </p:txBody>
       </p:sp>
       <p:sp>
         <p:nvSpPr>
@@ -2572,6 +3619,10 @@
             <a:prstDash val="solid"/>
           </a:ln>
         </p:spPr>
+        <p:txBody>
+          <a:bodyPr/>
+          <a:p/>
+        </p:txBody>
       </p:sp>
       <p:sp>
         <p:nvSpPr>
@@ -2659,7 +3710,7 @@
 </p:sld>
 </file>
 
-<file path=ppt/slides/slide11.xml><?xml version="1.0" encoding="utf-8"?>
+<file path=ppt/slides/slide12.xml><?xml version="1.0" encoding="utf-8"?>
 <p:sld xmlns:a="http://schemas.openxmlformats.org/drawingml/2006/main" xmlns:r="http://schemas.openxmlformats.org/officeDocument/2006/relationships" xmlns:p="http://schemas.openxmlformats.org/presentationml/2006/main">
   <p:cSld name="Slide 11">
     <p:bg>
@@ -2747,6 +3798,10 @@
             <a:prstDash val="solid"/>
           </a:ln>
         </p:spPr>
+        <p:txBody>
+          <a:bodyPr/>
+          <a:p/>
+        </p:txBody>
       </p:sp>
       <p:sp>
         <p:nvSpPr>
@@ -2822,6 +3877,10 @@
             <a:prstDash val="solid"/>
           </a:ln>
         </p:spPr>
+        <p:txBody>
+          <a:bodyPr/>
+          <a:p/>
+        </p:txBody>
       </p:sp>
       <p:sp>
         <p:nvSpPr>
@@ -3130,6 +4189,10 @@
             <a:prstDash val="solid"/>
           </a:ln>
         </p:spPr>
+        <p:txBody>
+          <a:bodyPr/>
+          <a:p/>
+        </p:txBody>
       </p:sp>
       <p:sp>
         <p:nvSpPr>
@@ -3371,6 +4434,10 @@
             <a:prstDash val="solid"/>
           </a:ln>
         </p:spPr>
+        <p:txBody>
+          <a:bodyPr/>
+          <a:p/>
+        </p:txBody>
       </p:sp>
       <p:sp>
         <p:nvSpPr>
@@ -3469,7 +4536,7 @@
 </p:sld>
 </file>
 
-<file path=ppt/slides/slide12.xml><?xml version="1.0" encoding="utf-8"?>
+<file path=ppt/slides/slide13.xml><?xml version="1.0" encoding="utf-8"?>
 <p:sld xmlns:a="http://schemas.openxmlformats.org/drawingml/2006/main" xmlns:r="http://schemas.openxmlformats.org/officeDocument/2006/relationships" xmlns:p="http://schemas.openxmlformats.org/presentationml/2006/main">
   <p:cSld name="Slide 12">
     <p:bg>
@@ -3596,6 +4663,10 @@
             <a:prstDash val="solid"/>
           </a:ln>
         </p:spPr>
+        <p:txBody>
+          <a:bodyPr/>
+          <a:p/>
+        </p:txBody>
       </p:sp>
       <p:sp>
         <p:nvSpPr>
@@ -3617,6 +4688,21 @@
         <p:txBody>
           <a:bodyPr wrap="square" lIns="0" tIns="0" rIns="0" bIns="0" rtlCol="0" anchor="t"/>
           <a:lstStyle/>
+          <a:p>
+            <a:pPr algn="ctr"/>
+            <a:r>
+              <a:rPr lang="ja-JP" sz="2200" b="1">
+                <a:solidFill>
+                  <a:srgbClr val="FFC800"/>
+                </a:solidFill>
+                <a:latin typeface="+mj-lt"/>
+              </a:rPr>
+              <a:t>★ 「迷ったらDevContainerから始める」</a:t>
+            </a:r>
+          </a:p>
+          <a:p>
+            <a:endParaRPr lang="ja-JP" sz="800"/>
+          </a:p>
           <a:p>
             <a:pPr marL="0" indent="0">
               <a:spcAft>
@@ -3758,6 +4844,10 @@
             <a:prstDash val="solid"/>
           </a:ln>
         </p:spPr>
+        <p:txBody>
+          <a:bodyPr/>
+          <a:p/>
+        </p:txBody>
       </p:sp>
       <p:sp>
         <p:nvSpPr>
@@ -3822,6 +4912,10 @@
             <a:prstDash val="solid"/>
           </a:ln>
         </p:spPr>
+        <p:txBody>
+          <a:bodyPr/>
+          <a:p/>
+        </p:txBody>
       </p:sp>
       <p:sp>
         <p:nvSpPr>
@@ -3886,6 +4980,10 @@
             <a:prstDash val="solid"/>
           </a:ln>
         </p:spPr>
+        <p:txBody>
+          <a:bodyPr/>
+          <a:p/>
+        </p:txBody>
       </p:sp>
       <p:sp>
         <p:nvSpPr>
@@ -3950,6 +5048,10 @@
             <a:prstDash val="solid"/>
           </a:ln>
         </p:spPr>
+        <p:txBody>
+          <a:bodyPr/>
+          <a:p/>
+        </p:txBody>
       </p:sp>
       <p:sp>
         <p:nvSpPr>
@@ -3987,6 +5089,39 @@
               <a:t>クラウドIAMは「何ができるか」で設計するという原則を持ち帰った</a:t>
             </a:r>
             <a:endParaRPr lang="en-US" sz="1200" dirty="0"/>
+          </a:p>
+        </p:txBody>
+      </p:sp>
+      <p:sp>
+        <p:nvSpPr>
+          <p:cNvPr id="14" name="TextBox 13"/>
+          <p:cNvSpPr txBox="1"/>
+          <p:nvPr/>
+        </p:nvSpPr>
+        <p:spPr>
+          <a:xfrm>
+            <a:off x="457200" y="4900000"/>
+            <a:ext cx="8229600" cy="220000"/>
+          </a:xfrm>
+          <a:prstGeom prst="rect">
+            <a:avLst/>
+          </a:prstGeom>
+          <a:noFill/>
+        </p:spPr>
+        <p:txBody>
+          <a:bodyPr wrap="square" lIns="0" rIns="0" tIns="0" bIns="0">
+            <a:spAutoFit/>
+          </a:bodyPr>
+          <a:lstStyle/>
+          <a:p>
+            <a:r>
+              <a:rPr sz="1100" b="1">
+                <a:solidFill>
+                  <a:srgbClr val="FFC800"/>
+                </a:solidFill>
+              </a:rPr>
+              <a:t>3原則の現在地：  01 分ける 🎯    02 防ぐ ⏳    03 残す ⏳</a:t>
+            </a:r>
           </a:p>
         </p:txBody>
       </p:sp>
@@ -3998,7 +5133,7 @@
 </p:sld>
 </file>
 
-<file path=ppt/slides/slide13.xml><?xml version="1.0" encoding="utf-8"?>
+<file path=ppt/slides/slide14.xml><?xml version="1.0" encoding="utf-8"?>
 <p:sld xmlns:a="http://schemas.openxmlformats.org/drawingml/2006/main" xmlns:r="http://schemas.openxmlformats.org/officeDocument/2006/relationships" xmlns:p="http://schemas.openxmlformats.org/presentationml/2006/main">
   <p:cSld name="Slide 13">
     <p:bg>
@@ -4125,6 +5260,10 @@
             <a:prstDash val="solid"/>
           </a:ln>
         </p:spPr>
+        <p:txBody>
+          <a:bodyPr/>
+          <a:p/>
+        </p:txBody>
       </p:sp>
       <p:sp>
         <p:nvSpPr>
@@ -4150,6 +5289,10 @@
             <a:prstDash val="solid"/>
           </a:ln>
         </p:spPr>
+        <p:txBody>
+          <a:bodyPr/>
+          <a:p/>
+        </p:txBody>
       </p:sp>
       <p:sp>
         <p:nvSpPr>
@@ -4264,6 +5407,10 @@
             <a:prstDash val="solid"/>
           </a:ln>
         </p:spPr>
+        <p:txBody>
+          <a:bodyPr/>
+          <a:p/>
+        </p:txBody>
       </p:sp>
       <p:sp>
         <p:nvSpPr>
@@ -4328,6 +5475,10 @@
             <a:prstDash val="solid"/>
           </a:ln>
         </p:spPr>
+        <p:txBody>
+          <a:bodyPr/>
+          <a:p/>
+        </p:txBody>
       </p:sp>
       <p:sp>
         <p:nvSpPr>
@@ -4392,6 +5543,10 @@
             <a:prstDash val="solid"/>
           </a:ln>
         </p:spPr>
+        <p:txBody>
+          <a:bodyPr/>
+          <a:p/>
+        </p:txBody>
       </p:sp>
       <p:sp>
         <p:nvSpPr>
@@ -4456,6 +5611,10 @@
             <a:prstDash val="solid"/>
           </a:ln>
         </p:spPr>
+        <p:txBody>
+          <a:bodyPr/>
+          <a:p/>
+        </p:txBody>
       </p:sp>
       <p:sp>
         <p:nvSpPr>
@@ -4481,6 +5640,10 @@
             <a:prstDash val="solid"/>
           </a:ln>
         </p:spPr>
+        <p:txBody>
+          <a:bodyPr/>
+          <a:p/>
+        </p:txBody>
       </p:sp>
       <p:sp>
         <p:nvSpPr>
@@ -4580,6 +5743,264 @@
 </file>
 
 <file path=ppt/slides/slide2.xml><?xml version="1.0" encoding="utf-8"?>
+<p:sld xmlns:a="http://schemas.openxmlformats.org/drawingml/2006/main" xmlns:p="http://schemas.openxmlformats.org/presentationml/2006/main" xmlns:r="http://schemas.openxmlformats.org/officeDocument/2006/relationships">
+  <p:cSld>
+    <p:bg>
+      <p:bgPr>
+        <a:solidFill>
+          <a:srgbClr val="FFFFFF"/>
+        </a:solidFill>
+        <a:effectLst/>
+      </p:bgPr>
+    </p:bg>
+    <p:spTree>
+      <p:nvGrpSpPr>
+        <p:cNvPr id="1" name=""/>
+        <p:cNvGrpSpPr/>
+        <p:nvPr/>
+      </p:nvGrpSpPr>
+      <p:grpSpPr/>
+      <p:sp>
+        <p:nvSpPr>
+          <p:cNvPr id="2" name="TextBox 1"/>
+          <p:cNvSpPr txBox="1"/>
+          <p:nvPr/>
+        </p:nvSpPr>
+        <p:spPr>
+          <a:xfrm>
+            <a:off x="457200" y="320040"/>
+            <a:ext cx="8229600" cy="548640"/>
+          </a:xfrm>
+          <a:prstGeom prst="rect">
+            <a:avLst/>
+          </a:prstGeom>
+          <a:noFill/>
+        </p:spPr>
+        <p:txBody>
+          <a:bodyPr wrap="square" lIns="0" rIns="0" tIns="0" bIns="0">
+            <a:spAutoFit/>
+          </a:bodyPr>
+          <a:lstStyle/>
+          <a:p>
+            <a:r>
+              <a:rPr sz="2600" b="1" i="0">
+                <a:solidFill>
+                  <a:srgbClr val="1E2761"/>
+                </a:solidFill>
+              </a:rPr>
+              <a:t>今日の用語ミニ辞典 ― 迷ったらここに戻る</a:t>
+            </a:r>
+          </a:p>
+        </p:txBody>
+      </p:sp>
+      <p:sp>
+        <p:nvSpPr>
+          <p:cNvPr id="3" name="TextBox 2"/>
+          <p:cNvSpPr txBox="1"/>
+          <p:nvPr/>
+        </p:nvSpPr>
+        <p:spPr>
+          <a:xfrm>
+            <a:off x="457200" y="960000"/>
+            <a:ext cx="8229600" cy="330000"/>
+          </a:xfrm>
+          <a:prstGeom prst="rect">
+            <a:avLst/>
+          </a:prstGeom>
+          <a:noFill/>
+        </p:spPr>
+        <p:txBody>
+          <a:bodyPr wrap="square" lIns="0" rIns="0" tIns="0" bIns="0">
+            <a:spAutoFit/>
+          </a:bodyPr>
+          <a:lstStyle/>
+          <a:p>
+            <a:r>
+              <a:rPr sz="1300" b="0" i="1">
+                <a:solidFill>
+                  <a:srgbClr val="64748B"/>
+                </a:solidFill>
+              </a:rPr>
+              <a:t>今日のスライドで初めて出てくるカタカナ語を1行で説明</a:t>
+            </a:r>
+          </a:p>
+        </p:txBody>
+      </p:sp>
+      <p:sp>
+        <p:nvSpPr>
+          <p:cNvPr id="4" name="TextBox 3"/>
+          <p:cNvSpPr txBox="1"/>
+          <p:nvPr/>
+        </p:nvSpPr>
+        <p:spPr>
+          <a:xfrm>
+            <a:off x="457200" y="1450000"/>
+            <a:ext cx="8229600" cy="3500000"/>
+          </a:xfrm>
+          <a:prstGeom prst="rect">
+            <a:avLst/>
+          </a:prstGeom>
+          <a:noFill/>
+        </p:spPr>
+        <p:txBody>
+          <a:bodyPr wrap="square" lIns="0" rIns="0" tIns="0" bIns="0">
+            <a:spAutoFit/>
+          </a:bodyPr>
+          <a:lstStyle/>
+          <a:p>
+            <a:r>
+              <a:rPr sz="1600" b="1">
+                <a:solidFill>
+                  <a:srgbClr val="1E2761"/>
+                </a:solidFill>
+              </a:rPr>
+              <a:t>●  DevContainer</a:t>
+            </a:r>
+            <a:r>
+              <a:rPr sz="1400" b="0">
+                <a:solidFill>
+                  <a:srgbClr val="2D3748"/>
+                </a:solidFill>
+              </a:rPr>
+              <a:t>　＝　プロジェクトごとの使い捨て開発コンテナ</a:t>
+            </a:r>
+          </a:p>
+          <a:p>
+            <a:pPr>
+              <a:spcBef>
+                <a:spcPts val="800"/>
+              </a:spcBef>
+            </a:pPr>
+            <a:r>
+              <a:rPr sz="1600" b="1">
+                <a:solidFill>
+                  <a:srgbClr val="1E2761"/>
+                </a:solidFill>
+              </a:rPr>
+              <a:t>●  L1〜L4</a:t>
+            </a:r>
+            <a:r>
+              <a:rPr sz="1400" b="0">
+                <a:solidFill>
+                  <a:srgbClr val="2D3748"/>
+                </a:solidFill>
+              </a:rPr>
+              <a:t>　＝　分離の強度レベル（プロセス→コンテナ→VM→物理マシン）</a:t>
+            </a:r>
+          </a:p>
+          <a:p>
+            <a:pPr>
+              <a:spcBef>
+                <a:spcPts val="800"/>
+              </a:spcBef>
+            </a:pPr>
+            <a:r>
+              <a:rPr sz="1600" b="1">
+                <a:solidFill>
+                  <a:srgbClr val="1E2761"/>
+                </a:solidFill>
+              </a:rPr>
+              <a:t>●  IAMロール</a:t>
+            </a:r>
+            <a:r>
+              <a:rPr sz="1400" b="0">
+                <a:solidFill>
+                  <a:srgbClr val="2D3748"/>
+                </a:solidFill>
+              </a:rPr>
+              <a:t>　＝　クラウド上の「誰が何をできるか」の権限定義</a:t>
+            </a:r>
+          </a:p>
+          <a:p>
+            <a:pPr>
+              <a:spcBef>
+                <a:spcPts val="800"/>
+              </a:spcBef>
+            </a:pPr>
+            <a:r>
+              <a:rPr sz="1600" b="1">
+                <a:solidFill>
+                  <a:srgbClr val="1E2761"/>
+                </a:solidFill>
+              </a:rPr>
+              <a:t>●  IMDSv2</a:t>
+            </a:r>
+            <a:r>
+              <a:rPr sz="1400" b="0">
+                <a:solidFill>
+                  <a:srgbClr val="2D3748"/>
+                </a:solidFill>
+              </a:rPr>
+              <a:t>　＝　クラウドの認証情報を盗まれにくくしたエンドポイント</a:t>
+            </a:r>
+          </a:p>
+          <a:p>
+            <a:pPr>
+              <a:spcBef>
+                <a:spcPts val="800"/>
+              </a:spcBef>
+            </a:pPr>
+            <a:r>
+              <a:rPr sz="1600" b="1">
+                <a:solidFill>
+                  <a:srgbClr val="1E2761"/>
+                </a:solidFill>
+              </a:rPr>
+              <a:t>●  最小権限</a:t>
+            </a:r>
+            <a:r>
+              <a:rPr sz="1400" b="0">
+                <a:solidFill>
+                  <a:srgbClr val="2D3748"/>
+                </a:solidFill>
+              </a:rPr>
+              <a:t>　＝　必要なものだけ許可する設計の基本原則</a:t>
+            </a:r>
+          </a:p>
+        </p:txBody>
+      </p:sp>
+      <p:sp>
+        <p:nvSpPr>
+          <p:cNvPr id="5" name="TextBox 4"/>
+          <p:cNvSpPr txBox="1"/>
+          <p:nvPr/>
+        </p:nvSpPr>
+        <p:spPr>
+          <a:xfrm>
+            <a:off x="457200" y="4828032"/>
+            <a:ext cx="8229600" cy="228600"/>
+          </a:xfrm>
+          <a:prstGeom prst="rect">
+            <a:avLst/>
+          </a:prstGeom>
+          <a:noFill/>
+        </p:spPr>
+        <p:txBody>
+          <a:bodyPr wrap="square" lIns="0" rIns="0" tIns="0" bIns="0">
+            <a:spAutoFit/>
+          </a:bodyPr>
+          <a:lstStyle/>
+          <a:p>
+            <a:r>
+              <a:rPr sz="1000" b="0" i="1">
+                <a:solidFill>
+                  <a:srgbClr val="64748B"/>
+                </a:solidFill>
+              </a:rPr>
+              <a:t>★ 用語が分からなくなったらここへ戻ってください</a:t>
+            </a:r>
+          </a:p>
+        </p:txBody>
+      </p:sp>
+    </p:spTree>
+  </p:cSld>
+  <p:clrMapOvr>
+    <a:masterClrMapping/>
+  </p:clrMapOvr>
+</p:sld>
+</file>
+
+<file path=ppt/slides/slide3.xml><?xml version="1.0" encoding="utf-8"?>
 <p:sld xmlns:a="http://schemas.openxmlformats.org/drawingml/2006/main" xmlns:r="http://schemas.openxmlformats.org/officeDocument/2006/relationships" xmlns:p="http://schemas.openxmlformats.org/presentationml/2006/main">
   <p:cSld name="Slide 2">
     <p:bg>
@@ -4667,6 +6088,10 @@
             <a:prstDash val="solid"/>
           </a:ln>
         </p:spPr>
+        <p:txBody>
+          <a:bodyPr/>
+          <a:p/>
+        </p:txBody>
       </p:sp>
       <p:sp>
         <p:nvSpPr>
@@ -4731,6 +6156,10 @@
             <a:prstDash val="solid"/>
           </a:ln>
         </p:spPr>
+        <p:txBody>
+          <a:bodyPr/>
+          <a:p/>
+        </p:txBody>
       </p:sp>
       <p:sp>
         <p:nvSpPr>
@@ -4756,6 +6185,10 @@
             <a:prstDash val="solid"/>
           </a:ln>
         </p:spPr>
+        <p:txBody>
+          <a:bodyPr/>
+          <a:p/>
+        </p:txBody>
       </p:sp>
       <p:pic>
         <p:nvPicPr>
@@ -4922,6 +6355,10 @@
             <a:prstDash val="solid"/>
           </a:ln>
         </p:spPr>
+        <p:txBody>
+          <a:bodyPr/>
+          <a:p/>
+        </p:txBody>
       </p:sp>
       <p:sp>
         <p:nvSpPr>
@@ -4986,6 +6423,10 @@
             <a:prstDash val="solid"/>
           </a:ln>
         </p:spPr>
+        <p:txBody>
+          <a:bodyPr/>
+          <a:p/>
+        </p:txBody>
       </p:sp>
       <p:pic>
         <p:nvPicPr>
@@ -5191,6 +6632,10 @@
             <a:prstDash val="solid"/>
           </a:ln>
         </p:spPr>
+        <p:txBody>
+          <a:bodyPr/>
+          <a:p/>
+        </p:txBody>
       </p:sp>
       <p:pic>
         <p:nvPicPr>
@@ -5396,6 +6841,10 @@
             <a:prstDash val="solid"/>
           </a:ln>
         </p:spPr>
+        <p:txBody>
+          <a:bodyPr/>
+          <a:p/>
+        </p:txBody>
       </p:sp>
       <p:sp>
         <p:nvSpPr>
@@ -5506,7 +6955,7 @@
 </p:sld>
 </file>
 
-<file path=ppt/slides/slide3.xml><?xml version="1.0" encoding="utf-8"?>
+<file path=ppt/slides/slide4.xml><?xml version="1.0" encoding="utf-8"?>
 <p:sld xmlns:a="http://schemas.openxmlformats.org/drawingml/2006/main" xmlns:r="http://schemas.openxmlformats.org/officeDocument/2006/relationships" xmlns:p="http://schemas.openxmlformats.org/presentationml/2006/main">
   <p:cSld name="Slide 3">
     <p:bg>
@@ -5594,6 +7043,10 @@
             <a:prstDash val="solid"/>
           </a:ln>
         </p:spPr>
+        <p:txBody>
+          <a:bodyPr/>
+          <a:p/>
+        </p:txBody>
       </p:sp>
       <p:sp>
         <p:nvSpPr>
@@ -5658,6 +7111,10 @@
             <a:prstDash val="solid"/>
           </a:ln>
         </p:spPr>
+        <p:txBody>
+          <a:bodyPr/>
+          <a:p/>
+        </p:txBody>
       </p:sp>
       <p:sp>
         <p:nvSpPr>
@@ -5683,6 +7140,10 @@
             <a:prstDash val="solid"/>
           </a:ln>
         </p:spPr>
+        <p:txBody>
+          <a:bodyPr/>
+          <a:p/>
+        </p:txBody>
       </p:sp>
       <p:sp>
         <p:nvSpPr>
@@ -5708,6 +7169,10 @@
             <a:prstDash val="solid"/>
           </a:ln>
         </p:spPr>
+        <p:txBody>
+          <a:bodyPr/>
+          <a:p/>
+        </p:txBody>
       </p:sp>
       <p:sp>
         <p:nvSpPr>
@@ -5848,6 +7313,10 @@
             <a:prstDash val="solid"/>
           </a:ln>
         </p:spPr>
+        <p:txBody>
+          <a:bodyPr/>
+          <a:p/>
+        </p:txBody>
       </p:sp>
       <p:sp>
         <p:nvSpPr>
@@ -5915,6 +7384,10 @@
             <a:prstDash val="solid"/>
           </a:ln>
         </p:spPr>
+        <p:txBody>
+          <a:bodyPr/>
+          <a:p/>
+        </p:txBody>
       </p:sp>
       <p:sp>
         <p:nvSpPr>
@@ -5940,6 +7413,10 @@
             <a:prstDash val="solid"/>
           </a:ln>
         </p:spPr>
+        <p:txBody>
+          <a:bodyPr/>
+          <a:p/>
+        </p:txBody>
       </p:sp>
       <p:sp>
         <p:nvSpPr>
@@ -5965,6 +7442,10 @@
             <a:prstDash val="solid"/>
           </a:ln>
         </p:spPr>
+        <p:txBody>
+          <a:bodyPr/>
+          <a:p/>
+        </p:txBody>
       </p:sp>
       <p:sp>
         <p:nvSpPr>
@@ -6105,6 +7586,10 @@
             <a:prstDash val="solid"/>
           </a:ln>
         </p:spPr>
+        <p:txBody>
+          <a:bodyPr/>
+          <a:p/>
+        </p:txBody>
       </p:sp>
       <p:sp>
         <p:nvSpPr>
@@ -6172,6 +7657,10 @@
             <a:prstDash val="solid"/>
           </a:ln>
         </p:spPr>
+        <p:txBody>
+          <a:bodyPr/>
+          <a:p/>
+        </p:txBody>
       </p:sp>
       <p:sp>
         <p:nvSpPr>
@@ -6197,6 +7686,10 @@
             <a:prstDash val="solid"/>
           </a:ln>
         </p:spPr>
+        <p:txBody>
+          <a:bodyPr/>
+          <a:p/>
+        </p:txBody>
       </p:sp>
       <p:sp>
         <p:nvSpPr>
@@ -6222,6 +7715,10 @@
             <a:prstDash val="solid"/>
           </a:ln>
         </p:spPr>
+        <p:txBody>
+          <a:bodyPr/>
+          <a:p/>
+        </p:txBody>
       </p:sp>
       <p:sp>
         <p:nvSpPr>
@@ -6362,6 +7859,10 @@
             <a:prstDash val="solid"/>
           </a:ln>
         </p:spPr>
+        <p:txBody>
+          <a:bodyPr/>
+          <a:p/>
+        </p:txBody>
       </p:sp>
       <p:sp>
         <p:nvSpPr>
@@ -6429,6 +7930,10 @@
             <a:prstDash val="solid"/>
           </a:ln>
         </p:spPr>
+        <p:txBody>
+          <a:bodyPr/>
+          <a:p/>
+        </p:txBody>
       </p:sp>
       <p:sp>
         <p:nvSpPr>
@@ -6527,7 +8032,7 @@
 </p:sld>
 </file>
 
-<file path=ppt/slides/slide4.xml><?xml version="1.0" encoding="utf-8"?>
+<file path=ppt/slides/slide5.xml><?xml version="1.0" encoding="utf-8"?>
 <p:sld xmlns:a="http://schemas.openxmlformats.org/drawingml/2006/main" xmlns:r="http://schemas.openxmlformats.org/officeDocument/2006/relationships" xmlns:p="http://schemas.openxmlformats.org/presentationml/2006/main">
   <p:cSld name="Slide 4">
     <p:bg>
@@ -6615,6 +8120,10 @@
             <a:prstDash val="solid"/>
           </a:ln>
         </p:spPr>
+        <p:txBody>
+          <a:bodyPr/>
+          <a:p/>
+        </p:txBody>
       </p:sp>
       <p:sp>
         <p:nvSpPr>
@@ -6679,6 +8188,10 @@
             <a:prstDash val="solid"/>
           </a:ln>
         </p:spPr>
+        <p:txBody>
+          <a:bodyPr/>
+          <a:p/>
+        </p:txBody>
       </p:sp>
       <p:sp>
         <p:nvSpPr>
@@ -6732,6 +8245,10 @@
             <a:prstDash val="solid"/>
           </a:ln>
         </p:spPr>
+        <p:txBody>
+          <a:bodyPr/>
+          <a:p/>
+        </p:txBody>
       </p:sp>
       <p:sp>
         <p:nvSpPr>
@@ -6796,6 +8313,10 @@
             <a:prstDash val="solid"/>
           </a:ln>
         </p:spPr>
+        <p:txBody>
+          <a:bodyPr/>
+          <a:p/>
+        </p:txBody>
       </p:sp>
       <p:sp>
         <p:nvSpPr>
@@ -6931,6 +8452,10 @@
             <a:prstDash val="solid"/>
           </a:ln>
         </p:spPr>
+        <p:txBody>
+          <a:bodyPr/>
+          <a:p/>
+        </p:txBody>
       </p:sp>
       <p:sp>
         <p:nvSpPr>
@@ -6995,6 +8520,10 @@
             <a:prstDash val="solid"/>
           </a:ln>
         </p:spPr>
+        <p:txBody>
+          <a:bodyPr/>
+          <a:p/>
+        </p:txBody>
       </p:sp>
       <p:sp>
         <p:nvSpPr>
@@ -7059,6 +8588,10 @@
             <a:prstDash val="solid"/>
           </a:ln>
         </p:spPr>
+        <p:txBody>
+          <a:bodyPr/>
+          <a:p/>
+        </p:txBody>
       </p:sp>
       <p:sp>
         <p:nvSpPr>
@@ -7123,6 +8656,10 @@
             <a:prstDash val="solid"/>
           </a:ln>
         </p:spPr>
+        <p:txBody>
+          <a:bodyPr/>
+          <a:p/>
+        </p:txBody>
       </p:sp>
       <p:sp>
         <p:nvSpPr>
@@ -7187,6 +8724,10 @@
             <a:prstDash val="solid"/>
           </a:ln>
         </p:spPr>
+        <p:txBody>
+          <a:bodyPr/>
+          <a:p/>
+        </p:txBody>
       </p:sp>
       <p:sp>
         <p:nvSpPr>
@@ -7251,6 +8792,10 @@
             <a:prstDash val="solid"/>
           </a:ln>
         </p:spPr>
+        <p:txBody>
+          <a:bodyPr/>
+          <a:p/>
+        </p:txBody>
       </p:sp>
       <p:sp>
         <p:nvSpPr>
@@ -7315,6 +8860,10 @@
             <a:prstDash val="solid"/>
           </a:ln>
         </p:spPr>
+        <p:txBody>
+          <a:bodyPr/>
+          <a:p/>
+        </p:txBody>
       </p:sp>
       <p:sp>
         <p:nvSpPr>
@@ -7379,6 +8928,10 @@
             <a:prstDash val="solid"/>
           </a:ln>
         </p:spPr>
+        <p:txBody>
+          <a:bodyPr/>
+          <a:p/>
+        </p:txBody>
       </p:sp>
       <p:sp>
         <p:nvSpPr>
@@ -7443,6 +8996,10 @@
             <a:prstDash val="solid"/>
           </a:ln>
         </p:spPr>
+        <p:txBody>
+          <a:bodyPr/>
+          <a:p/>
+        </p:txBody>
       </p:sp>
       <p:sp>
         <p:nvSpPr>
@@ -7507,6 +9064,10 @@
             <a:prstDash val="solid"/>
           </a:ln>
         </p:spPr>
+        <p:txBody>
+          <a:bodyPr/>
+          <a:p/>
+        </p:txBody>
       </p:sp>
       <p:sp>
         <p:nvSpPr>
@@ -7571,6 +9132,10 @@
             <a:prstDash val="solid"/>
           </a:ln>
         </p:spPr>
+        <p:txBody>
+          <a:bodyPr/>
+          <a:p/>
+        </p:txBody>
       </p:sp>
       <p:sp>
         <p:nvSpPr>
@@ -7635,6 +9200,10 @@
             <a:prstDash val="solid"/>
           </a:ln>
         </p:spPr>
+        <p:txBody>
+          <a:bodyPr/>
+          <a:p/>
+        </p:txBody>
       </p:sp>
       <p:sp>
         <p:nvSpPr>
@@ -7699,6 +9268,10 @@
             <a:prstDash val="solid"/>
           </a:ln>
         </p:spPr>
+        <p:txBody>
+          <a:bodyPr/>
+          <a:p/>
+        </p:txBody>
       </p:sp>
       <p:sp>
         <p:nvSpPr>
@@ -7763,6 +9336,10 @@
             <a:prstDash val="solid"/>
           </a:ln>
         </p:spPr>
+        <p:txBody>
+          <a:bodyPr/>
+          <a:p/>
+        </p:txBody>
       </p:sp>
       <p:sp>
         <p:nvSpPr>
@@ -7827,6 +9404,10 @@
             <a:prstDash val="solid"/>
           </a:ln>
         </p:spPr>
+        <p:txBody>
+          <a:bodyPr/>
+          <a:p/>
+        </p:txBody>
       </p:sp>
       <p:sp>
         <p:nvSpPr>
@@ -7891,6 +9472,10 @@
             <a:prstDash val="solid"/>
           </a:ln>
         </p:spPr>
+        <p:txBody>
+          <a:bodyPr/>
+          <a:p/>
+        </p:txBody>
       </p:sp>
       <p:sp>
         <p:nvSpPr>
@@ -7955,6 +9540,10 @@
             <a:prstDash val="solid"/>
           </a:ln>
         </p:spPr>
+        <p:txBody>
+          <a:bodyPr/>
+          <a:p/>
+        </p:txBody>
       </p:sp>
       <p:sp>
         <p:nvSpPr>
@@ -8019,6 +9608,10 @@
             <a:prstDash val="solid"/>
           </a:ln>
         </p:spPr>
+        <p:txBody>
+          <a:bodyPr/>
+          <a:p/>
+        </p:txBody>
       </p:sp>
       <p:sp>
         <p:nvSpPr>
@@ -8083,6 +9676,10 @@
             <a:prstDash val="solid"/>
           </a:ln>
         </p:spPr>
+        <p:txBody>
+          <a:bodyPr/>
+          <a:p/>
+        </p:txBody>
       </p:sp>
       <p:sp>
         <p:nvSpPr>
@@ -8147,6 +9744,10 @@
             <a:prstDash val="solid"/>
           </a:ln>
         </p:spPr>
+        <p:txBody>
+          <a:bodyPr/>
+          <a:p/>
+        </p:txBody>
       </p:sp>
       <p:sp>
         <p:nvSpPr>
@@ -8211,6 +9812,10 @@
             <a:prstDash val="solid"/>
           </a:ln>
         </p:spPr>
+        <p:txBody>
+          <a:bodyPr/>
+          <a:p/>
+        </p:txBody>
       </p:sp>
       <p:sp>
         <p:nvSpPr>
@@ -8275,6 +9880,10 @@
             <a:prstDash val="solid"/>
           </a:ln>
         </p:spPr>
+        <p:txBody>
+          <a:bodyPr/>
+          <a:p/>
+        </p:txBody>
       </p:sp>
       <p:sp>
         <p:nvSpPr>
@@ -8309,7 +9918,7 @@
                 <a:ea typeface="Meiryo" pitchFamily="34" charset="-122"/>
                 <a:cs typeface="Meiryo" pitchFamily="34" charset="-120"/>
               </a:rPr>
-              <a:t>💡 </a:t>
+              <a:t>→ DevContainerの選び方は FAQ Q1-1 / VMとコンテナの使い分けは FAQ Q1-5</a:t>
             </a:r>
             <a:r>
               <a:rPr lang="en-US" sz="1100" dirty="0">
@@ -8320,7 +9929,7 @@
                 <a:ea typeface="Meiryo" pitchFamily="34" charset="-122"/>
                 <a:cs typeface="Meiryo" pitchFamily="34" charset="-120"/>
               </a:rPr>
-              <a:t>Claude Code の基本線は </a:t>
+              <a:t/>
             </a:r>
             <a:r>
               <a:rPr lang="en-US" sz="1100" b="1" dirty="0">
@@ -8331,7 +9940,7 @@
                 <a:ea typeface="Meiryo" pitchFamily="34" charset="-122"/>
                 <a:cs typeface="Meiryo" pitchFamily="34" charset="-120"/>
               </a:rPr>
-              <a:t>L2（DevContainer）</a:t>
+              <a:t/>
             </a:r>
             <a:r>
               <a:rPr lang="en-US" sz="1100" dirty="0">
@@ -8342,7 +9951,7 @@
                 <a:ea typeface="Meiryo" pitchFamily="34" charset="-122"/>
                 <a:cs typeface="Meiryo" pitchFamily="34" charset="-120"/>
               </a:rPr>
-              <a:t>。高リスクタスクは L4 を検討 / L2 はさらに内部で細分化できる </a:t>
+              <a:t/>
             </a:r>
             <a:r>
               <a:rPr lang="en-US" sz="1100" b="1" dirty="0">
@@ -8353,7 +9962,7 @@
                 <a:ea typeface="Meiryo" pitchFamily="34" charset="-122"/>
                 <a:cs typeface="Meiryo" pitchFamily="34" charset="-120"/>
               </a:rPr>
-              <a:t>→ 次スライド</a:t>
+              <a:t/>
             </a:r>
             <a:endParaRPr lang="en-US" sz="1100" dirty="0"/>
           </a:p>
@@ -8406,7 +10015,7 @@
 </p:sld>
 </file>
 
-<file path=ppt/slides/slide5.xml><?xml version="1.0" encoding="utf-8"?>
+<file path=ppt/slides/slide6.xml><?xml version="1.0" encoding="utf-8"?>
 <p:sld xmlns:a="http://schemas.openxmlformats.org/drawingml/2006/main" xmlns:r="http://schemas.openxmlformats.org/officeDocument/2006/relationships" xmlns:p="http://schemas.openxmlformats.org/presentationml/2006/main">
   <p:cSld name="Slide 5">
     <p:bg>
@@ -8494,6 +10103,10 @@
             <a:prstDash val="solid"/>
           </a:ln>
         </p:spPr>
+        <p:txBody>
+          <a:bodyPr/>
+          <a:p/>
+        </p:txBody>
       </p:sp>
       <p:sp>
         <p:nvSpPr>
@@ -8558,6 +10171,10 @@
             <a:prstDash val="solid"/>
           </a:ln>
         </p:spPr>
+        <p:txBody>
+          <a:bodyPr/>
+          <a:p/>
+        </p:txBody>
       </p:sp>
       <p:sp>
         <p:nvSpPr>
@@ -8622,6 +10239,10 @@
             <a:prstDash val="solid"/>
           </a:ln>
         </p:spPr>
+        <p:txBody>
+          <a:bodyPr/>
+          <a:p/>
+        </p:txBody>
       </p:sp>
       <p:sp>
         <p:nvSpPr>
@@ -8703,6 +10324,10 @@
             <a:prstDash val="solid"/>
           </a:ln>
         </p:spPr>
+        <p:txBody>
+          <a:bodyPr/>
+          <a:p/>
+        </p:txBody>
       </p:sp>
       <p:pic>
         <p:nvPicPr>
@@ -8834,6 +10459,10 @@
             <a:prstDash val="solid"/>
           </a:ln>
         </p:spPr>
+        <p:txBody>
+          <a:bodyPr/>
+          <a:p/>
+        </p:txBody>
       </p:sp>
       <p:sp>
         <p:nvSpPr>
@@ -8898,6 +10527,10 @@
             <a:prstDash val="solid"/>
           </a:ln>
         </p:spPr>
+        <p:txBody>
+          <a:bodyPr/>
+          <a:p/>
+        </p:txBody>
       </p:sp>
       <p:sp>
         <p:nvSpPr>
@@ -8962,6 +10595,10 @@
             <a:prstDash val="solid"/>
           </a:ln>
         </p:spPr>
+        <p:txBody>
+          <a:bodyPr/>
+          <a:p/>
+        </p:txBody>
       </p:sp>
       <p:sp>
         <p:nvSpPr>
@@ -9026,6 +10663,10 @@
             <a:prstDash val="solid"/>
           </a:ln>
         </p:spPr>
+        <p:txBody>
+          <a:bodyPr/>
+          <a:p/>
+        </p:txBody>
       </p:sp>
       <p:sp>
         <p:nvSpPr>
@@ -9090,6 +10731,10 @@
             <a:prstDash val="solid"/>
           </a:ln>
         </p:spPr>
+        <p:txBody>
+          <a:bodyPr/>
+          <a:p/>
+        </p:txBody>
       </p:sp>
       <p:sp>
         <p:nvSpPr>
@@ -9154,6 +10799,10 @@
             <a:prstDash val="solid"/>
           </a:ln>
         </p:spPr>
+        <p:txBody>
+          <a:bodyPr/>
+          <a:p/>
+        </p:txBody>
       </p:sp>
       <p:sp>
         <p:nvSpPr>
@@ -9218,6 +10867,10 @@
             <a:prstDash val="solid"/>
           </a:ln>
         </p:spPr>
+        <p:txBody>
+          <a:bodyPr/>
+          <a:p/>
+        </p:txBody>
       </p:sp>
       <p:sp>
         <p:nvSpPr>
@@ -9282,6 +10935,10 @@
             <a:prstDash val="solid"/>
           </a:ln>
         </p:spPr>
+        <p:txBody>
+          <a:bodyPr/>
+          <a:p/>
+        </p:txBody>
       </p:sp>
       <p:sp>
         <p:nvSpPr>
@@ -9346,6 +11003,10 @@
             <a:prstDash val="solid"/>
           </a:ln>
         </p:spPr>
+        <p:txBody>
+          <a:bodyPr/>
+          <a:p/>
+        </p:txBody>
       </p:sp>
       <p:sp>
         <p:nvSpPr>
@@ -9410,6 +11071,10 @@
             <a:prstDash val="solid"/>
           </a:ln>
         </p:spPr>
+        <p:txBody>
+          <a:bodyPr/>
+          <a:p/>
+        </p:txBody>
       </p:sp>
       <p:sp>
         <p:nvSpPr>
@@ -9474,6 +11139,10 @@
             <a:prstDash val="solid"/>
           </a:ln>
         </p:spPr>
+        <p:txBody>
+          <a:bodyPr/>
+          <a:p/>
+        </p:txBody>
       </p:sp>
       <p:sp>
         <p:nvSpPr>
@@ -9538,6 +11207,10 @@
             <a:prstDash val="solid"/>
           </a:ln>
         </p:spPr>
+        <p:txBody>
+          <a:bodyPr/>
+          <a:p/>
+        </p:txBody>
       </p:sp>
       <p:sp>
         <p:nvSpPr>
@@ -9602,6 +11275,10 @@
             <a:prstDash val="solid"/>
           </a:ln>
         </p:spPr>
+        <p:txBody>
+          <a:bodyPr/>
+          <a:p/>
+        </p:txBody>
       </p:sp>
       <p:sp>
         <p:nvSpPr>
@@ -9677,6 +11354,10 @@
             <a:prstDash val="solid"/>
           </a:ln>
         </p:spPr>
+        <p:txBody>
+          <a:bodyPr/>
+          <a:p/>
+        </p:txBody>
       </p:sp>
       <p:sp>
         <p:nvSpPr>
@@ -9808,7 +11489,7 @@
 </p:sld>
 </file>
 
-<file path=ppt/slides/slide6.xml><?xml version="1.0" encoding="utf-8"?>
+<file path=ppt/slides/slide7.xml><?xml version="1.0" encoding="utf-8"?>
 <p:sld xmlns:a="http://schemas.openxmlformats.org/drawingml/2006/main" xmlns:r="http://schemas.openxmlformats.org/officeDocument/2006/relationships" xmlns:p="http://schemas.openxmlformats.org/presentationml/2006/main">
   <p:cSld name="Slide 6">
     <p:bg>
@@ -9896,6 +11577,10 @@
             <a:prstDash val="solid"/>
           </a:ln>
         </p:spPr>
+        <p:txBody>
+          <a:bodyPr/>
+          <a:p/>
+        </p:txBody>
       </p:sp>
       <p:sp>
         <p:nvSpPr>
@@ -9960,6 +11645,10 @@
             <a:prstDash val="solid"/>
           </a:ln>
         </p:spPr>
+        <p:txBody>
+          <a:bodyPr/>
+          <a:p/>
+        </p:txBody>
       </p:sp>
       <p:sp>
         <p:nvSpPr>
@@ -10024,6 +11713,10 @@
             <a:prstDash val="solid"/>
           </a:ln>
         </p:spPr>
+        <p:txBody>
+          <a:bodyPr/>
+          <a:p/>
+        </p:txBody>
       </p:sp>
       <p:sp>
         <p:nvSpPr>
@@ -10088,6 +11781,10 @@
             <a:prstDash val="solid"/>
           </a:ln>
         </p:spPr>
+        <p:txBody>
+          <a:bodyPr/>
+          <a:p/>
+        </p:txBody>
       </p:sp>
       <p:sp>
         <p:nvSpPr>
@@ -10152,6 +11849,10 @@
             <a:prstDash val="solid"/>
           </a:ln>
         </p:spPr>
+        <p:txBody>
+          <a:bodyPr/>
+          <a:p/>
+        </p:txBody>
       </p:sp>
       <p:sp>
         <p:nvSpPr>
@@ -10216,6 +11917,10 @@
             <a:prstDash val="solid"/>
           </a:ln>
         </p:spPr>
+        <p:txBody>
+          <a:bodyPr/>
+          <a:p/>
+        </p:txBody>
       </p:sp>
       <p:sp>
         <p:nvSpPr>
@@ -10280,6 +11985,10 @@
             <a:prstDash val="solid"/>
           </a:ln>
         </p:spPr>
+        <p:txBody>
+          <a:bodyPr/>
+          <a:p/>
+        </p:txBody>
       </p:sp>
       <p:sp>
         <p:nvSpPr>
@@ -10344,6 +12053,10 @@
             <a:prstDash val="solid"/>
           </a:ln>
         </p:spPr>
+        <p:txBody>
+          <a:bodyPr/>
+          <a:p/>
+        </p:txBody>
       </p:sp>
       <p:sp>
         <p:nvSpPr>
@@ -10408,6 +12121,10 @@
             <a:prstDash val="solid"/>
           </a:ln>
         </p:spPr>
+        <p:txBody>
+          <a:bodyPr/>
+          <a:p/>
+        </p:txBody>
       </p:sp>
       <p:sp>
         <p:nvSpPr>
@@ -10472,6 +12189,10 @@
             <a:prstDash val="solid"/>
           </a:ln>
         </p:spPr>
+        <p:txBody>
+          <a:bodyPr/>
+          <a:p/>
+        </p:txBody>
       </p:sp>
       <p:sp>
         <p:nvSpPr>
@@ -10536,6 +12257,10 @@
             <a:prstDash val="solid"/>
           </a:ln>
         </p:spPr>
+        <p:txBody>
+          <a:bodyPr/>
+          <a:p/>
+        </p:txBody>
       </p:sp>
       <p:sp>
         <p:nvSpPr>
@@ -10600,6 +12325,10 @@
             <a:prstDash val="solid"/>
           </a:ln>
         </p:spPr>
+        <p:txBody>
+          <a:bodyPr/>
+          <a:p/>
+        </p:txBody>
       </p:sp>
       <p:sp>
         <p:nvSpPr>
@@ -10664,6 +12393,10 @@
             <a:prstDash val="solid"/>
           </a:ln>
         </p:spPr>
+        <p:txBody>
+          <a:bodyPr/>
+          <a:p/>
+        </p:txBody>
       </p:sp>
       <p:sp>
         <p:nvSpPr>
@@ -10728,6 +12461,10 @@
             <a:prstDash val="solid"/>
           </a:ln>
         </p:spPr>
+        <p:txBody>
+          <a:bodyPr/>
+          <a:p/>
+        </p:txBody>
       </p:sp>
       <p:sp>
         <p:nvSpPr>
@@ -10792,6 +12529,10 @@
             <a:prstDash val="solid"/>
           </a:ln>
         </p:spPr>
+        <p:txBody>
+          <a:bodyPr/>
+          <a:p/>
+        </p:txBody>
       </p:sp>
       <p:sp>
         <p:nvSpPr>
@@ -10856,6 +12597,10 @@
             <a:prstDash val="solid"/>
           </a:ln>
         </p:spPr>
+        <p:txBody>
+          <a:bodyPr/>
+          <a:p/>
+        </p:txBody>
       </p:sp>
       <p:sp>
         <p:nvSpPr>
@@ -10920,6 +12665,10 @@
             <a:prstDash val="solid"/>
           </a:ln>
         </p:spPr>
+        <p:txBody>
+          <a:bodyPr/>
+          <a:p/>
+        </p:txBody>
       </p:sp>
       <p:sp>
         <p:nvSpPr>
@@ -10984,6 +12733,10 @@
             <a:prstDash val="solid"/>
           </a:ln>
         </p:spPr>
+        <p:txBody>
+          <a:bodyPr/>
+          <a:p/>
+        </p:txBody>
       </p:sp>
       <p:sp>
         <p:nvSpPr>
@@ -11048,6 +12801,10 @@
             <a:prstDash val="solid"/>
           </a:ln>
         </p:spPr>
+        <p:txBody>
+          <a:bodyPr/>
+          <a:p/>
+        </p:txBody>
       </p:sp>
       <p:sp>
         <p:nvSpPr>
@@ -11112,6 +12869,10 @@
             <a:prstDash val="solid"/>
           </a:ln>
         </p:spPr>
+        <p:txBody>
+          <a:bodyPr/>
+          <a:p/>
+        </p:txBody>
       </p:sp>
       <p:sp>
         <p:nvSpPr>
@@ -11176,6 +12937,10 @@
             <a:prstDash val="solid"/>
           </a:ln>
         </p:spPr>
+        <p:txBody>
+          <a:bodyPr/>
+          <a:p/>
+        </p:txBody>
       </p:sp>
       <p:sp>
         <p:nvSpPr>
@@ -11240,6 +13005,10 @@
             <a:prstDash val="solid"/>
           </a:ln>
         </p:spPr>
+        <p:txBody>
+          <a:bodyPr/>
+          <a:p/>
+        </p:txBody>
       </p:sp>
       <p:sp>
         <p:nvSpPr>
@@ -11304,6 +13073,10 @@
             <a:prstDash val="solid"/>
           </a:ln>
         </p:spPr>
+        <p:txBody>
+          <a:bodyPr/>
+          <a:p/>
+        </p:txBody>
       </p:sp>
       <p:sp>
         <p:nvSpPr>
@@ -11368,6 +13141,10 @@
             <a:prstDash val="solid"/>
           </a:ln>
         </p:spPr>
+        <p:txBody>
+          <a:bodyPr/>
+          <a:p/>
+        </p:txBody>
       </p:sp>
       <p:sp>
         <p:nvSpPr>
@@ -11432,6 +13209,10 @@
             <a:prstDash val="solid"/>
           </a:ln>
         </p:spPr>
+        <p:txBody>
+          <a:bodyPr/>
+          <a:p/>
+        </p:txBody>
       </p:sp>
       <p:sp>
         <p:nvSpPr>
@@ -11496,6 +13277,10 @@
             <a:prstDash val="solid"/>
           </a:ln>
         </p:spPr>
+        <p:txBody>
+          <a:bodyPr/>
+          <a:p/>
+        </p:txBody>
       </p:sp>
       <p:sp>
         <p:nvSpPr>
@@ -11560,6 +13345,10 @@
             <a:prstDash val="solid"/>
           </a:ln>
         </p:spPr>
+        <p:txBody>
+          <a:bodyPr/>
+          <a:p/>
+        </p:txBody>
       </p:sp>
       <p:sp>
         <p:nvSpPr>
@@ -11624,6 +13413,10 @@
             <a:prstDash val="solid"/>
           </a:ln>
         </p:spPr>
+        <p:txBody>
+          <a:bodyPr/>
+          <a:p/>
+        </p:txBody>
       </p:sp>
       <p:sp>
         <p:nvSpPr>
@@ -11688,6 +13481,10 @@
             <a:prstDash val="solid"/>
           </a:ln>
         </p:spPr>
+        <p:txBody>
+          <a:bodyPr/>
+          <a:p/>
+        </p:txBody>
       </p:sp>
       <p:sp>
         <p:nvSpPr>
@@ -11752,6 +13549,10 @@
             <a:prstDash val="solid"/>
           </a:ln>
         </p:spPr>
+        <p:txBody>
+          <a:bodyPr/>
+          <a:p/>
+        </p:txBody>
       </p:sp>
       <p:sp>
         <p:nvSpPr>
@@ -11816,6 +13617,10 @@
             <a:prstDash val="solid"/>
           </a:ln>
         </p:spPr>
+        <p:txBody>
+          <a:bodyPr/>
+          <a:p/>
+        </p:txBody>
       </p:sp>
       <p:sp>
         <p:nvSpPr>
@@ -11880,6 +13685,10 @@
             <a:prstDash val="solid"/>
           </a:ln>
         </p:spPr>
+        <p:txBody>
+          <a:bodyPr/>
+          <a:p/>
+        </p:txBody>
       </p:sp>
       <p:sp>
         <p:nvSpPr>
@@ -11944,6 +13753,10 @@
             <a:prstDash val="solid"/>
           </a:ln>
         </p:spPr>
+        <p:txBody>
+          <a:bodyPr/>
+          <a:p/>
+        </p:txBody>
       </p:sp>
       <p:sp>
         <p:nvSpPr>
@@ -12008,6 +13821,10 @@
             <a:prstDash val="solid"/>
           </a:ln>
         </p:spPr>
+        <p:txBody>
+          <a:bodyPr/>
+          <a:p/>
+        </p:txBody>
       </p:sp>
       <p:sp>
         <p:nvSpPr>
@@ -12072,6 +13889,10 @@
             <a:prstDash val="solid"/>
           </a:ln>
         </p:spPr>
+        <p:txBody>
+          <a:bodyPr/>
+          <a:p/>
+        </p:txBody>
       </p:sp>
       <p:sp>
         <p:nvSpPr>
@@ -12136,6 +13957,10 @@
             <a:prstDash val="solid"/>
           </a:ln>
         </p:spPr>
+        <p:txBody>
+          <a:bodyPr/>
+          <a:p/>
+        </p:txBody>
       </p:sp>
       <p:sp>
         <p:nvSpPr>
@@ -12200,6 +14025,10 @@
             <a:prstDash val="solid"/>
           </a:ln>
         </p:spPr>
+        <p:txBody>
+          <a:bodyPr/>
+          <a:p/>
+        </p:txBody>
       </p:sp>
       <p:sp>
         <p:nvSpPr>
@@ -12264,6 +14093,10 @@
             <a:prstDash val="solid"/>
           </a:ln>
         </p:spPr>
+        <p:txBody>
+          <a:bodyPr/>
+          <a:p/>
+        </p:txBody>
       </p:sp>
       <p:sp>
         <p:nvSpPr>
@@ -12328,6 +14161,10 @@
             <a:prstDash val="solid"/>
           </a:ln>
         </p:spPr>
+        <p:txBody>
+          <a:bodyPr/>
+          <a:p/>
+        </p:txBody>
       </p:sp>
       <p:sp>
         <p:nvSpPr>
@@ -12392,6 +14229,10 @@
             <a:prstDash val="solid"/>
           </a:ln>
         </p:spPr>
+        <p:txBody>
+          <a:bodyPr/>
+          <a:p/>
+        </p:txBody>
       </p:sp>
       <p:sp>
         <p:nvSpPr>
@@ -12456,6 +14297,10 @@
             <a:prstDash val="solid"/>
           </a:ln>
         </p:spPr>
+        <p:txBody>
+          <a:bodyPr/>
+          <a:p/>
+        </p:txBody>
       </p:sp>
       <p:sp>
         <p:nvSpPr>
@@ -12520,6 +14365,10 @@
             <a:prstDash val="solid"/>
           </a:ln>
         </p:spPr>
+        <p:txBody>
+          <a:bodyPr/>
+          <a:p/>
+        </p:txBody>
       </p:sp>
       <p:sp>
         <p:nvSpPr>
@@ -12662,7 +14511,7 @@
 </p:sld>
 </file>
 
-<file path=ppt/slides/slide7.xml><?xml version="1.0" encoding="utf-8"?>
+<file path=ppt/slides/slide8.xml><?xml version="1.0" encoding="utf-8"?>
 <p:sld xmlns:a="http://schemas.openxmlformats.org/drawingml/2006/main" xmlns:r="http://schemas.openxmlformats.org/officeDocument/2006/relationships" xmlns:p="http://schemas.openxmlformats.org/presentationml/2006/main">
   <p:cSld name="Slide 7">
     <p:bg>
@@ -12750,6 +14599,10 @@
             <a:prstDash val="solid"/>
           </a:ln>
         </p:spPr>
+        <p:txBody>
+          <a:bodyPr/>
+          <a:p/>
+        </p:txBody>
       </p:sp>
       <p:sp>
         <p:nvSpPr>
@@ -12814,6 +14667,10 @@
             <a:prstDash val="solid"/>
           </a:ln>
         </p:spPr>
+        <p:txBody>
+          <a:bodyPr/>
+          <a:p/>
+        </p:txBody>
       </p:sp>
       <p:sp>
         <p:nvSpPr>
@@ -12839,6 +14696,10 @@
             <a:prstDash val="solid"/>
           </a:ln>
         </p:spPr>
+        <p:txBody>
+          <a:bodyPr/>
+          <a:p/>
+        </p:txBody>
       </p:sp>
       <p:sp>
         <p:nvSpPr>
@@ -12914,6 +14775,10 @@
             <a:prstDash val="solid"/>
           </a:ln>
         </p:spPr>
+        <p:txBody>
+          <a:bodyPr/>
+          <a:p/>
+        </p:txBody>
       </p:sp>
       <p:sp>
         <p:nvSpPr>
@@ -13293,6 +15158,10 @@
             <a:prstDash val="solid"/>
           </a:ln>
         </p:spPr>
+        <p:txBody>
+          <a:bodyPr/>
+          <a:p/>
+        </p:txBody>
       </p:sp>
       <p:sp>
         <p:nvSpPr>
@@ -13357,6 +15226,10 @@
             <a:prstDash val="solid"/>
           </a:ln>
         </p:spPr>
+        <p:txBody>
+          <a:bodyPr/>
+          <a:p/>
+        </p:txBody>
       </p:sp>
       <p:sp>
         <p:nvSpPr>
@@ -13382,6 +15255,10 @@
             <a:prstDash val="solid"/>
           </a:ln>
         </p:spPr>
+        <p:txBody>
+          <a:bodyPr/>
+          <a:p/>
+        </p:txBody>
       </p:sp>
       <p:sp>
         <p:nvSpPr>
@@ -13457,6 +15334,10 @@
             <a:prstDash val="solid"/>
           </a:ln>
         </p:spPr>
+        <p:txBody>
+          <a:bodyPr/>
+          <a:p/>
+        </p:txBody>
       </p:sp>
       <p:sp>
         <p:nvSpPr>
@@ -13521,6 +15402,10 @@
             <a:prstDash val="dash"/>
           </a:ln>
         </p:spPr>
+        <p:txBody>
+          <a:bodyPr/>
+          <a:p/>
+        </p:txBody>
       </p:sp>
       <p:sp>
         <p:nvSpPr>
@@ -14119,6 +16004,10 @@
             <a:prstDash val="solid"/>
           </a:ln>
         </p:spPr>
+        <p:txBody>
+          <a:bodyPr/>
+          <a:p/>
+        </p:txBody>
       </p:sp>
       <p:sp>
         <p:nvSpPr>
@@ -14183,6 +16072,10 @@
             <a:prstDash val="solid"/>
           </a:ln>
         </p:spPr>
+        <p:txBody>
+          <a:bodyPr/>
+          <a:p/>
+        </p:txBody>
       </p:sp>
       <p:sp>
         <p:nvSpPr>
@@ -14275,7 +16168,7 @@
 </p:sld>
 </file>
 
-<file path=ppt/slides/slide8.xml><?xml version="1.0" encoding="utf-8"?>
+<file path=ppt/slides/slide9.xml><?xml version="1.0" encoding="utf-8"?>
 <p:sld xmlns:a="http://schemas.openxmlformats.org/drawingml/2006/main" xmlns:r="http://schemas.openxmlformats.org/officeDocument/2006/relationships" xmlns:p="http://schemas.openxmlformats.org/presentationml/2006/main">
   <p:cSld name="Slide 8">
     <p:bg>
@@ -14363,6 +16256,10 @@
             <a:prstDash val="solid"/>
           </a:ln>
         </p:spPr>
+        <p:txBody>
+          <a:bodyPr/>
+          <a:p/>
+        </p:txBody>
       </p:sp>
       <p:sp>
         <p:nvSpPr>
@@ -14427,6 +16324,10 @@
             <a:prstDash val="solid"/>
           </a:ln>
         </p:spPr>
+        <p:txBody>
+          <a:bodyPr/>
+          <a:p/>
+        </p:txBody>
       </p:sp>
       <p:pic>
         <p:nvPicPr>
@@ -14554,6 +16455,10 @@
             <a:prstDash val="solid"/>
           </a:ln>
         </p:spPr>
+        <p:txBody>
+          <a:bodyPr/>
+          <a:p/>
+        </p:txBody>
       </p:sp>
       <p:pic>
         <p:nvPicPr>
@@ -14681,6 +16586,10 @@
             <a:prstDash val="solid"/>
           </a:ln>
         </p:spPr>
+        <p:txBody>
+          <a:bodyPr/>
+          <a:p/>
+        </p:txBody>
       </p:sp>
       <p:pic>
         <p:nvPicPr>
@@ -14808,6 +16717,10 @@
             <a:prstDash val="solid"/>
           </a:ln>
         </p:spPr>
+        <p:txBody>
+          <a:bodyPr/>
+          <a:p/>
+        </p:txBody>
       </p:sp>
       <p:sp>
         <p:nvSpPr>
@@ -14833,6 +16746,10 @@
             <a:prstDash val="solid"/>
           </a:ln>
         </p:spPr>
+        <p:txBody>
+          <a:bodyPr/>
+          <a:p/>
+        </p:txBody>
       </p:sp>
       <p:sp>
         <p:nvSpPr>
@@ -14897,6 +16814,10 @@
             <a:prstDash val="solid"/>
           </a:ln>
         </p:spPr>
+        <p:txBody>
+          <a:bodyPr/>
+          <a:p/>
+        </p:txBody>
       </p:sp>
       <p:sp>
         <p:nvSpPr>
@@ -14961,6 +16882,10 @@
             <a:prstDash val="solid"/>
           </a:ln>
         </p:spPr>
+        <p:txBody>
+          <a:bodyPr/>
+          <a:p/>
+        </p:txBody>
       </p:sp>
       <p:sp>
         <p:nvSpPr>
@@ -15025,6 +16950,10 @@
             <a:prstDash val="solid"/>
           </a:ln>
         </p:spPr>
+        <p:txBody>
+          <a:bodyPr/>
+          <a:p/>
+        </p:txBody>
       </p:sp>
       <p:sp>
         <p:nvSpPr>
@@ -15089,6 +17018,10 @@
             <a:prstDash val="solid"/>
           </a:ln>
         </p:spPr>
+        <p:txBody>
+          <a:bodyPr/>
+          <a:p/>
+        </p:txBody>
       </p:sp>
       <p:sp>
         <p:nvSpPr>
@@ -15153,6 +17086,10 @@
             <a:prstDash val="solid"/>
           </a:ln>
         </p:spPr>
+        <p:txBody>
+          <a:bodyPr/>
+          <a:p/>
+        </p:txBody>
       </p:sp>
       <p:sp>
         <p:nvSpPr>
@@ -15210,939 +17147,6 @@
                 <a:cs typeface="Meiryo" pitchFamily="34" charset="-120"/>
               </a:rPr>
               <a:t> の2つが、クラウドで「分ける」の肝</a:t>
-            </a:r>
-            <a:endParaRPr lang="en-US" sz="1100" dirty="0"/>
-          </a:p>
-        </p:txBody>
-      </p:sp>
-    </p:spTree>
-  </p:cSld>
-  <p:clrMapOvr>
-    <a:masterClrMapping/>
-  </p:clrMapOvr>
-</p:sld>
-</file>
-
-<file path=ppt/slides/slide9.xml><?xml version="1.0" encoding="utf-8"?>
-<p:sld xmlns:a="http://schemas.openxmlformats.org/drawingml/2006/main" xmlns:r="http://schemas.openxmlformats.org/officeDocument/2006/relationships" xmlns:p="http://schemas.openxmlformats.org/presentationml/2006/main">
-  <p:cSld name="Slide 9">
-    <p:bg>
-      <p:bgPr>
-        <a:solidFill>
-          <a:srgbClr val="FFFFFF"/>
-        </a:solidFill>
-        <a:effectLst/>
-      </p:bgPr>
-    </p:bg>
-    <p:spTree>
-      <p:nvGrpSpPr>
-        <p:cNvPr id="1" name=""/>
-        <p:cNvGrpSpPr/>
-        <p:nvPr/>
-      </p:nvGrpSpPr>
-      <p:grpSpPr>
-        <a:xfrm>
-          <a:off x="0" y="0"/>
-          <a:ext cx="0" cy="0"/>
-          <a:chOff x="0" y="0"/>
-          <a:chExt cx="0" cy="0"/>
-        </a:xfrm>
-      </p:grpSpPr>
-      <p:sp>
-        <p:nvSpPr>
-          <p:cNvPr id="2" name="Text 0"/>
-          <p:cNvSpPr/>
-          <p:nvPr/>
-        </p:nvSpPr>
-        <p:spPr>
-          <a:xfrm>
-            <a:off x="457200" y="320040"/>
-            <a:ext cx="8229600" cy="548640"/>
-          </a:xfrm>
-          <a:prstGeom prst="rect">
-            <a:avLst/>
-          </a:prstGeom>
-          <a:noFill/>
-          <a:ln/>
-        </p:spPr>
-        <p:txBody>
-          <a:bodyPr wrap="square" lIns="0" tIns="0" rIns="0" bIns="0" rtlCol="0" anchor="ctr"/>
-          <a:lstStyle/>
-          <a:p>
-            <a:pPr marL="0" indent="0">
-              <a:buNone/>
-            </a:pPr>
-            <a:r>
-              <a:rPr lang="en-US" sz="2600" b="1" dirty="0">
-                <a:solidFill>
-                  <a:srgbClr val="1E2761"/>
-                </a:solidFill>
-                <a:latin typeface="Arial Black" pitchFamily="34" charset="0"/>
-                <a:ea typeface="Arial Black" pitchFamily="34" charset="-122"/>
-                <a:cs typeface="Arial Black" pitchFamily="34" charset="-120"/>
-              </a:rPr>
-              <a:t>あなたはどの環境で動かすべきか</a:t>
-            </a:r>
-            <a:endParaRPr lang="en-US" sz="2600" dirty="0"/>
-          </a:p>
-        </p:txBody>
-      </p:sp>
-      <p:sp>
-        <p:nvSpPr>
-          <p:cNvPr id="3" name="Shape 1"/>
-          <p:cNvSpPr/>
-          <p:nvPr/>
-        </p:nvSpPr>
-        <p:spPr>
-          <a:xfrm>
-            <a:off x="457200" y="932688"/>
-            <a:ext cx="548640" cy="45720"/>
-          </a:xfrm>
-          <a:prstGeom prst="rect">
-            <a:avLst/>
-          </a:prstGeom>
-          <a:solidFill>
-            <a:srgbClr val="F96167"/>
-          </a:solidFill>
-          <a:ln w="12700">
-            <a:solidFill>
-              <a:srgbClr val="F96167"/>
-            </a:solidFill>
-            <a:prstDash val="solid"/>
-          </a:ln>
-        </p:spPr>
-      </p:sp>
-      <p:sp>
-        <p:nvSpPr>
-          <p:cNvPr id="4" name="Text 2"/>
-          <p:cNvSpPr/>
-          <p:nvPr/>
-        </p:nvSpPr>
-        <p:spPr>
-          <a:xfrm>
-            <a:off x="457200" y="1051560"/>
-            <a:ext cx="8229600" cy="274320"/>
-          </a:xfrm>
-          <a:prstGeom prst="rect">
-            <a:avLst/>
-          </a:prstGeom>
-          <a:noFill/>
-          <a:ln/>
-        </p:spPr>
-        <p:txBody>
-          <a:bodyPr wrap="square" lIns="0" tIns="0" rIns="0" bIns="0" rtlCol="0" anchor="ctr"/>
-          <a:lstStyle/>
-          <a:p>
-            <a:pPr marL="0" indent="0">
-              <a:buNone/>
-            </a:pPr>
-            <a:r>
-              <a:rPr lang="en-US" sz="1300" i="1" dirty="0">
-                <a:solidFill>
-                  <a:srgbClr val="64748B"/>
-                </a:solidFill>
-                <a:latin typeface="Meiryo" pitchFamily="34" charset="0"/>
-                <a:ea typeface="Meiryo" pitchFamily="34" charset="-122"/>
-                <a:cs typeface="Meiryo" pitchFamily="34" charset="-120"/>
-              </a:rPr>
-              <a:t>迷ったら DevContainer。ここから始めて必要に応じてスケールアップ</a:t>
-            </a:r>
-            <a:endParaRPr lang="en-US" sz="1300" dirty="0"/>
-          </a:p>
-        </p:txBody>
-      </p:sp>
-      <p:sp>
-        <p:nvSpPr>
-          <p:cNvPr id="5" name="Shape 3"/>
-          <p:cNvSpPr/>
-          <p:nvPr/>
-        </p:nvSpPr>
-        <p:spPr>
-          <a:xfrm>
-            <a:off x="3200400" y="1417320"/>
-            <a:ext cx="2743200" cy="457200"/>
-          </a:xfrm>
-          <a:prstGeom prst="rect">
-            <a:avLst/>
-          </a:prstGeom>
-          <a:solidFill>
-            <a:srgbClr val="1E2761"/>
-          </a:solidFill>
-          <a:ln w="12700">
-            <a:solidFill>
-              <a:srgbClr val="1E2761"/>
-            </a:solidFill>
-            <a:prstDash val="solid"/>
-          </a:ln>
-        </p:spPr>
-      </p:sp>
-      <p:sp>
-        <p:nvSpPr>
-          <p:cNvPr id="6" name="Text 4"/>
-          <p:cNvSpPr/>
-          <p:nvPr/>
-        </p:nvSpPr>
-        <p:spPr>
-          <a:xfrm>
-            <a:off x="3200400" y="1417320"/>
-            <a:ext cx="2743200" cy="457200"/>
-          </a:xfrm>
-          <a:prstGeom prst="rect">
-            <a:avLst/>
-          </a:prstGeom>
-          <a:noFill/>
-          <a:ln/>
-        </p:spPr>
-        <p:txBody>
-          <a:bodyPr wrap="square" lIns="0" tIns="0" rIns="0" bIns="0" rtlCol="0" anchor="ctr"/>
-          <a:lstStyle/>
-          <a:p>
-            <a:pPr marL="0" indent="0" algn="ctr">
-              <a:buNone/>
-            </a:pPr>
-            <a:r>
-              <a:rPr lang="en-US" sz="1200" b="1" dirty="0">
-                <a:solidFill>
-                  <a:srgbClr val="FFFFFF"/>
-                </a:solidFill>
-                <a:latin typeface="Meiryo" pitchFamily="34" charset="0"/>
-                <a:ea typeface="Meiryo" pitchFamily="34" charset="-122"/>
-                <a:cs typeface="Meiryo" pitchFamily="34" charset="-120"/>
-              </a:rPr>
-              <a:t>Q1: 業務で機密情報を扱う？</a:t>
-            </a:r>
-            <a:endParaRPr lang="en-US" sz="1200" dirty="0"/>
-          </a:p>
-        </p:txBody>
-      </p:sp>
-      <p:sp>
-        <p:nvSpPr>
-          <p:cNvPr id="7" name="Shape 5"/>
-          <p:cNvSpPr/>
-          <p:nvPr/>
-        </p:nvSpPr>
-        <p:spPr>
-          <a:xfrm>
-            <a:off x="457200" y="2606040"/>
-            <a:ext cx="2743200" cy="457200"/>
-          </a:xfrm>
-          <a:prstGeom prst="rect">
-            <a:avLst/>
-          </a:prstGeom>
-          <a:solidFill>
-            <a:srgbClr val="1E2761"/>
-          </a:solidFill>
-          <a:ln w="12700">
-            <a:solidFill>
-              <a:srgbClr val="1E2761"/>
-            </a:solidFill>
-            <a:prstDash val="solid"/>
-          </a:ln>
-        </p:spPr>
-      </p:sp>
-      <p:sp>
-        <p:nvSpPr>
-          <p:cNvPr id="8" name="Text 6"/>
-          <p:cNvSpPr/>
-          <p:nvPr/>
-        </p:nvSpPr>
-        <p:spPr>
-          <a:xfrm>
-            <a:off x="457200" y="2606040"/>
-            <a:ext cx="2743200" cy="457200"/>
-          </a:xfrm>
-          <a:prstGeom prst="rect">
-            <a:avLst/>
-          </a:prstGeom>
-          <a:noFill/>
-          <a:ln/>
-        </p:spPr>
-        <p:txBody>
-          <a:bodyPr wrap="square" lIns="0" tIns="0" rIns="0" bIns="0" rtlCol="0" anchor="ctr"/>
-          <a:lstStyle/>
-          <a:p>
-            <a:pPr marL="0" indent="0" algn="ctr">
-              <a:buNone/>
-            </a:pPr>
-            <a:r>
-              <a:rPr lang="en-US" sz="1200" b="1" dirty="0">
-                <a:solidFill>
-                  <a:srgbClr val="FFFFFF"/>
-                </a:solidFill>
-                <a:latin typeface="Meiryo" pitchFamily="34" charset="0"/>
-                <a:ea typeface="Meiryo" pitchFamily="34" charset="-122"/>
-                <a:cs typeface="Meiryo" pitchFamily="34" charset="-120"/>
-              </a:rPr>
-              <a:t>Q2: 規制業界（金融/医療）？</a:t>
-            </a:r>
-            <a:endParaRPr lang="en-US" sz="1200" dirty="0"/>
-          </a:p>
-        </p:txBody>
-      </p:sp>
-      <p:sp>
-        <p:nvSpPr>
-          <p:cNvPr id="9" name="Shape 7"/>
-          <p:cNvSpPr/>
-          <p:nvPr/>
-        </p:nvSpPr>
-        <p:spPr>
-          <a:xfrm>
-            <a:off x="4572000" y="1874520"/>
-            <a:ext cx="0" cy="228600"/>
-          </a:xfrm>
-          <a:prstGeom prst="line">
-            <a:avLst/>
-          </a:prstGeom>
-          <a:noFill/>
-          <a:ln w="25400">
-            <a:solidFill>
-              <a:srgbClr val="1E2761"/>
-            </a:solidFill>
-            <a:prstDash val="solid"/>
-          </a:ln>
-        </p:spPr>
-      </p:sp>
-      <p:sp>
-        <p:nvSpPr>
-          <p:cNvPr id="10" name="Shape 8"/>
-          <p:cNvSpPr/>
-          <p:nvPr/>
-        </p:nvSpPr>
-        <p:spPr>
-          <a:xfrm>
-            <a:off x="1828800" y="2103120"/>
-            <a:ext cx="5486400" cy="0"/>
-          </a:xfrm>
-          <a:prstGeom prst="line">
-            <a:avLst/>
-          </a:prstGeom>
-          <a:noFill/>
-          <a:ln w="25400">
-            <a:solidFill>
-              <a:srgbClr val="1E2761"/>
-            </a:solidFill>
-            <a:prstDash val="solid"/>
-          </a:ln>
-        </p:spPr>
-      </p:sp>
-      <p:sp>
-        <p:nvSpPr>
-          <p:cNvPr id="11" name="Shape 9"/>
-          <p:cNvSpPr/>
-          <p:nvPr/>
-        </p:nvSpPr>
-        <p:spPr>
-          <a:xfrm>
-            <a:off x="1828800" y="2103120"/>
-            <a:ext cx="0" cy="502920"/>
-          </a:xfrm>
-          <a:prstGeom prst="line">
-            <a:avLst/>
-          </a:prstGeom>
-          <a:noFill/>
-          <a:ln w="25400">
-            <a:solidFill>
-              <a:srgbClr val="1E2761"/>
-            </a:solidFill>
-            <a:prstDash val="solid"/>
-          </a:ln>
-        </p:spPr>
-      </p:sp>
-      <p:sp>
-        <p:nvSpPr>
-          <p:cNvPr id="12" name="Text 10"/>
-          <p:cNvSpPr/>
-          <p:nvPr/>
-        </p:nvSpPr>
-        <p:spPr>
-          <a:xfrm>
-            <a:off x="1463040" y="1874520"/>
-            <a:ext cx="548640" cy="201168"/>
-          </a:xfrm>
-          <a:prstGeom prst="rect">
-            <a:avLst/>
-          </a:prstGeom>
-          <a:noFill/>
-          <a:ln/>
-        </p:spPr>
-        <p:txBody>
-          <a:bodyPr wrap="square" lIns="0" tIns="0" rIns="0" bIns="0" rtlCol="0" anchor="ctr"/>
-          <a:lstStyle/>
-          <a:p>
-            <a:pPr marL="0" indent="0" algn="ctr">
-              <a:buNone/>
-            </a:pPr>
-            <a:r>
-              <a:rPr lang="en-US" sz="1000" b="1" dirty="0">
-                <a:solidFill>
-                  <a:srgbClr val="F96167"/>
-                </a:solidFill>
-                <a:latin typeface="Arial Black" pitchFamily="34" charset="0"/>
-                <a:ea typeface="Arial Black" pitchFamily="34" charset="-122"/>
-                <a:cs typeface="Arial Black" pitchFamily="34" charset="-120"/>
-              </a:rPr>
-              <a:t>YES</a:t>
-            </a:r>
-            <a:endParaRPr lang="en-US" sz="1000" dirty="0"/>
-          </a:p>
-        </p:txBody>
-      </p:sp>
-      <p:sp>
-        <p:nvSpPr>
-          <p:cNvPr id="13" name="Text 11"/>
-          <p:cNvSpPr/>
-          <p:nvPr/>
-        </p:nvSpPr>
-        <p:spPr>
-          <a:xfrm>
-            <a:off x="7040880" y="1874520"/>
-            <a:ext cx="548640" cy="201168"/>
-          </a:xfrm>
-          <a:prstGeom prst="rect">
-            <a:avLst/>
-          </a:prstGeom>
-          <a:noFill/>
-          <a:ln/>
-        </p:spPr>
-        <p:txBody>
-          <a:bodyPr wrap="square" lIns="0" tIns="0" rIns="0" bIns="0" rtlCol="0" anchor="ctr"/>
-          <a:lstStyle/>
-          <a:p>
-            <a:pPr marL="0" indent="0" algn="ctr">
-              <a:buNone/>
-            </a:pPr>
-            <a:r>
-              <a:rPr lang="en-US" sz="1000" b="1" dirty="0">
-                <a:solidFill>
-                  <a:srgbClr val="2E8B57"/>
-                </a:solidFill>
-                <a:latin typeface="Arial Black" pitchFamily="34" charset="0"/>
-                <a:ea typeface="Arial Black" pitchFamily="34" charset="-122"/>
-                <a:cs typeface="Arial Black" pitchFamily="34" charset="-120"/>
-              </a:rPr>
-              <a:t>NO</a:t>
-            </a:r>
-            <a:endParaRPr lang="en-US" sz="1000" dirty="0"/>
-          </a:p>
-        </p:txBody>
-      </p:sp>
-      <p:sp>
-        <p:nvSpPr>
-          <p:cNvPr id="14" name="Shape 12"/>
-          <p:cNvSpPr/>
-          <p:nvPr/>
-        </p:nvSpPr>
-        <p:spPr>
-          <a:xfrm>
-            <a:off x="1828800" y="3063240"/>
-            <a:ext cx="0" cy="274320"/>
-          </a:xfrm>
-          <a:prstGeom prst="line">
-            <a:avLst/>
-          </a:prstGeom>
-          <a:noFill/>
-          <a:ln w="25400">
-            <a:solidFill>
-              <a:srgbClr val="1E2761"/>
-            </a:solidFill>
-            <a:prstDash val="solid"/>
-          </a:ln>
-        </p:spPr>
-      </p:sp>
-      <p:sp>
-        <p:nvSpPr>
-          <p:cNvPr id="15" name="Shape 13"/>
-          <p:cNvSpPr/>
-          <p:nvPr/>
-        </p:nvSpPr>
-        <p:spPr>
-          <a:xfrm>
-            <a:off x="1280160" y="3337560"/>
-            <a:ext cx="1920240" cy="0"/>
-          </a:xfrm>
-          <a:prstGeom prst="line">
-            <a:avLst/>
-          </a:prstGeom>
-          <a:noFill/>
-          <a:ln w="25400">
-            <a:solidFill>
-              <a:srgbClr val="1E2761"/>
-            </a:solidFill>
-            <a:prstDash val="solid"/>
-          </a:ln>
-        </p:spPr>
-      </p:sp>
-      <p:sp>
-        <p:nvSpPr>
-          <p:cNvPr id="16" name="Shape 14"/>
-          <p:cNvSpPr/>
-          <p:nvPr/>
-        </p:nvSpPr>
-        <p:spPr>
-          <a:xfrm>
-            <a:off x="1280160" y="3337560"/>
-            <a:ext cx="0" cy="548640"/>
-          </a:xfrm>
-          <a:prstGeom prst="line">
-            <a:avLst/>
-          </a:prstGeom>
-          <a:noFill/>
-          <a:ln w="25400">
-            <a:solidFill>
-              <a:srgbClr val="1E2761"/>
-            </a:solidFill>
-            <a:prstDash val="solid"/>
-          </a:ln>
-        </p:spPr>
-      </p:sp>
-      <p:sp>
-        <p:nvSpPr>
-          <p:cNvPr id="17" name="Shape 15"/>
-          <p:cNvSpPr/>
-          <p:nvPr/>
-        </p:nvSpPr>
-        <p:spPr>
-          <a:xfrm>
-            <a:off x="3200400" y="3337560"/>
-            <a:ext cx="0" cy="548640"/>
-          </a:xfrm>
-          <a:prstGeom prst="line">
-            <a:avLst/>
-          </a:prstGeom>
-          <a:noFill/>
-          <a:ln w="25400">
-            <a:solidFill>
-              <a:srgbClr val="1E2761"/>
-            </a:solidFill>
-            <a:prstDash val="solid"/>
-          </a:ln>
-        </p:spPr>
-      </p:sp>
-      <p:sp>
-        <p:nvSpPr>
-          <p:cNvPr id="18" name="Text 16"/>
-          <p:cNvSpPr/>
-          <p:nvPr/>
-        </p:nvSpPr>
-        <p:spPr>
-          <a:xfrm>
-            <a:off x="960120" y="3136392"/>
-            <a:ext cx="548640" cy="182880"/>
-          </a:xfrm>
-          <a:prstGeom prst="rect">
-            <a:avLst/>
-          </a:prstGeom>
-          <a:noFill/>
-          <a:ln/>
-        </p:spPr>
-        <p:txBody>
-          <a:bodyPr wrap="square" lIns="0" tIns="0" rIns="0" bIns="0" rtlCol="0" anchor="ctr"/>
-          <a:lstStyle/>
-          <a:p>
-            <a:pPr marL="0" indent="0" algn="ctr">
-              <a:buNone/>
-            </a:pPr>
-            <a:r>
-              <a:rPr lang="en-US" sz="900" b="1" dirty="0">
-                <a:solidFill>
-                  <a:srgbClr val="F96167"/>
-                </a:solidFill>
-                <a:latin typeface="Arial Black" pitchFamily="34" charset="0"/>
-                <a:ea typeface="Arial Black" pitchFamily="34" charset="-122"/>
-                <a:cs typeface="Arial Black" pitchFamily="34" charset="-120"/>
-              </a:rPr>
-              <a:t>YES</a:t>
-            </a:r>
-            <a:endParaRPr lang="en-US" sz="900" dirty="0"/>
-          </a:p>
-        </p:txBody>
-      </p:sp>
-      <p:sp>
-        <p:nvSpPr>
-          <p:cNvPr id="19" name="Text 17"/>
-          <p:cNvSpPr/>
-          <p:nvPr/>
-        </p:nvSpPr>
-        <p:spPr>
-          <a:xfrm>
-            <a:off x="2926080" y="3136392"/>
-            <a:ext cx="548640" cy="182880"/>
-          </a:xfrm>
-          <a:prstGeom prst="rect">
-            <a:avLst/>
-          </a:prstGeom>
-          <a:noFill/>
-          <a:ln/>
-        </p:spPr>
-        <p:txBody>
-          <a:bodyPr wrap="square" lIns="0" tIns="0" rIns="0" bIns="0" rtlCol="0" anchor="ctr"/>
-          <a:lstStyle/>
-          <a:p>
-            <a:pPr marL="0" indent="0" algn="ctr">
-              <a:buNone/>
-            </a:pPr>
-            <a:r>
-              <a:rPr lang="en-US" sz="900" b="1" dirty="0">
-                <a:solidFill>
-                  <a:srgbClr val="2E8B57"/>
-                </a:solidFill>
-                <a:latin typeface="Arial Black" pitchFamily="34" charset="0"/>
-                <a:ea typeface="Arial Black" pitchFamily="34" charset="-122"/>
-                <a:cs typeface="Arial Black" pitchFamily="34" charset="-120"/>
-              </a:rPr>
-              <a:t>NO</a:t>
-            </a:r>
-            <a:endParaRPr lang="en-US" sz="900" dirty="0"/>
-          </a:p>
-        </p:txBody>
-      </p:sp>
-      <p:sp>
-        <p:nvSpPr>
-          <p:cNvPr id="20" name="Shape 18"/>
-          <p:cNvSpPr/>
-          <p:nvPr/>
-        </p:nvSpPr>
-        <p:spPr>
-          <a:xfrm>
-            <a:off x="7315200" y="2103120"/>
-            <a:ext cx="0" cy="1783080"/>
-          </a:xfrm>
-          <a:prstGeom prst="line">
-            <a:avLst/>
-          </a:prstGeom>
-          <a:noFill/>
-          <a:ln w="25400">
-            <a:solidFill>
-              <a:srgbClr val="1E2761"/>
-            </a:solidFill>
-            <a:prstDash val="solid"/>
-          </a:ln>
-        </p:spPr>
-      </p:sp>
-      <p:sp>
-        <p:nvSpPr>
-          <p:cNvPr id="21" name="Shape 19"/>
-          <p:cNvSpPr/>
-          <p:nvPr/>
-        </p:nvSpPr>
-        <p:spPr>
-          <a:xfrm>
-            <a:off x="457200" y="3886200"/>
-            <a:ext cx="1645920" cy="777240"/>
-          </a:xfrm>
-          <a:prstGeom prst="rect">
-            <a:avLst/>
-          </a:prstGeom>
-          <a:solidFill>
-            <a:srgbClr val="F96167"/>
-          </a:solidFill>
-          <a:ln w="12700">
-            <a:solidFill>
-              <a:srgbClr val="F96167"/>
-            </a:solidFill>
-            <a:prstDash val="solid"/>
-          </a:ln>
-        </p:spPr>
-      </p:sp>
-      <p:sp>
-        <p:nvSpPr>
-          <p:cNvPr id="22" name="Text 20"/>
-          <p:cNvSpPr/>
-          <p:nvPr/>
-        </p:nvSpPr>
-        <p:spPr>
-          <a:xfrm>
-            <a:off x="457200" y="3886200"/>
-            <a:ext cx="1645920" cy="777240"/>
-          </a:xfrm>
-          <a:prstGeom prst="rect">
-            <a:avLst/>
-          </a:prstGeom>
-          <a:noFill/>
-          <a:ln/>
-        </p:spPr>
-        <p:txBody>
-          <a:bodyPr wrap="square" lIns="0" tIns="0" rIns="0" bIns="0" rtlCol="0" anchor="ctr"/>
-          <a:lstStyle/>
-          <a:p>
-            <a:pPr marL="0" indent="0" algn="ctr">
-              <a:buNone/>
-            </a:pPr>
-            <a:r>
-              <a:rPr lang="en-US" sz="1300" b="1" dirty="0">
-                <a:solidFill>
-                  <a:srgbClr val="FFFFFF"/>
-                </a:solidFill>
-                <a:latin typeface="Meiryo" pitchFamily="34" charset="0"/>
-                <a:ea typeface="Meiryo" pitchFamily="34" charset="-122"/>
-                <a:cs typeface="Meiryo" pitchFamily="34" charset="-120"/>
-              </a:rPr>
-              <a:t>L4: 別端末</a:t>
-            </a:r>
-            <a:endParaRPr lang="en-US" sz="1300" dirty="0"/>
-          </a:p>
-          <a:p>
-            <a:pPr marL="0" indent="0" algn="ctr">
-              <a:buNone/>
-            </a:pPr>
-            <a:r>
-              <a:rPr lang="en-US" sz="1000" dirty="0">
-                <a:solidFill>
-                  <a:srgbClr val="FFFFFF"/>
-                </a:solidFill>
-                <a:latin typeface="Meiryo" pitchFamily="34" charset="0"/>
-                <a:ea typeface="Meiryo" pitchFamily="34" charset="-122"/>
-                <a:cs typeface="Meiryo" pitchFamily="34" charset="-120"/>
-              </a:rPr>
-              <a:t>(Mac mini等)</a:t>
-            </a:r>
-            <a:endParaRPr lang="en-US" sz="1300" dirty="0"/>
-          </a:p>
-        </p:txBody>
-      </p:sp>
-      <p:sp>
-        <p:nvSpPr>
-          <p:cNvPr id="23" name="Shape 21"/>
-          <p:cNvSpPr/>
-          <p:nvPr/>
-        </p:nvSpPr>
-        <p:spPr>
-          <a:xfrm>
-            <a:off x="2377440" y="3886200"/>
-            <a:ext cx="1645920" cy="777240"/>
-          </a:xfrm>
-          <a:prstGeom prst="rect">
-            <a:avLst/>
-          </a:prstGeom>
-          <a:solidFill>
-            <a:srgbClr val="1E2761"/>
-          </a:solidFill>
-          <a:ln w="12700">
-            <a:solidFill>
-              <a:srgbClr val="1E2761"/>
-            </a:solidFill>
-            <a:prstDash val="solid"/>
-          </a:ln>
-        </p:spPr>
-      </p:sp>
-      <p:sp>
-        <p:nvSpPr>
-          <p:cNvPr id="24" name="Text 22"/>
-          <p:cNvSpPr/>
-          <p:nvPr/>
-        </p:nvSpPr>
-        <p:spPr>
-          <a:xfrm>
-            <a:off x="2377440" y="3886200"/>
-            <a:ext cx="1645920" cy="777240"/>
-          </a:xfrm>
-          <a:prstGeom prst="rect">
-            <a:avLst/>
-          </a:prstGeom>
-          <a:noFill/>
-          <a:ln/>
-        </p:spPr>
-        <p:txBody>
-          <a:bodyPr wrap="square" lIns="0" tIns="0" rIns="0" bIns="0" rtlCol="0" anchor="ctr"/>
-          <a:lstStyle/>
-          <a:p>
-            <a:pPr marL="0" indent="0" algn="ctr">
-              <a:buNone/>
-            </a:pPr>
-            <a:r>
-              <a:rPr lang="en-US" sz="1300" b="1" dirty="0">
-                <a:solidFill>
-                  <a:srgbClr val="FFFFFF"/>
-                </a:solidFill>
-                <a:latin typeface="Meiryo" pitchFamily="34" charset="0"/>
-                <a:ea typeface="Meiryo" pitchFamily="34" charset="-122"/>
-                <a:cs typeface="Meiryo" pitchFamily="34" charset="-120"/>
-              </a:rPr>
-              <a:t>DevContainer ★</a:t>
-            </a:r>
-            <a:endParaRPr lang="en-US" sz="1300" dirty="0"/>
-          </a:p>
-          <a:p>
-            <a:pPr marL="0" indent="0" algn="ctr">
-              <a:buNone/>
-            </a:pPr>
-            <a:r>
-              <a:rPr lang="en-US" sz="1000" dirty="0">
-                <a:solidFill>
-                  <a:srgbClr val="CADCFC"/>
-                </a:solidFill>
-                <a:latin typeface="Meiryo" pitchFamily="34" charset="0"/>
-                <a:ea typeface="Meiryo" pitchFamily="34" charset="-122"/>
-                <a:cs typeface="Meiryo" pitchFamily="34" charset="-120"/>
-              </a:rPr>
-              <a:t>(基本線)</a:t>
-            </a:r>
-            <a:endParaRPr lang="en-US" sz="1300" dirty="0"/>
-          </a:p>
-        </p:txBody>
-      </p:sp>
-      <p:sp>
-        <p:nvSpPr>
-          <p:cNvPr id="25" name="Shape 23"/>
-          <p:cNvSpPr/>
-          <p:nvPr/>
-        </p:nvSpPr>
-        <p:spPr>
-          <a:xfrm>
-            <a:off x="6126480" y="3886200"/>
-            <a:ext cx="2377440" cy="777240"/>
-          </a:xfrm>
-          <a:prstGeom prst="rect">
-            <a:avLst/>
-          </a:prstGeom>
-          <a:solidFill>
-            <a:srgbClr val="2E8B57"/>
-          </a:solidFill>
-          <a:ln w="12700">
-            <a:solidFill>
-              <a:srgbClr val="2E8B57"/>
-            </a:solidFill>
-            <a:prstDash val="solid"/>
-          </a:ln>
-        </p:spPr>
-      </p:sp>
-      <p:sp>
-        <p:nvSpPr>
-          <p:cNvPr id="26" name="Text 24"/>
-          <p:cNvSpPr/>
-          <p:nvPr/>
-        </p:nvSpPr>
-        <p:spPr>
-          <a:xfrm>
-            <a:off x="6126480" y="3886200"/>
-            <a:ext cx="2377440" cy="777240"/>
-          </a:xfrm>
-          <a:prstGeom prst="rect">
-            <a:avLst/>
-          </a:prstGeom>
-          <a:noFill/>
-          <a:ln/>
-        </p:spPr>
-        <p:txBody>
-          <a:bodyPr wrap="square" lIns="0" tIns="0" rIns="0" bIns="0" rtlCol="0" anchor="ctr"/>
-          <a:lstStyle/>
-          <a:p>
-            <a:pPr marL="0" indent="0" algn="ctr">
-              <a:buNone/>
-            </a:pPr>
-            <a:r>
-              <a:rPr lang="en-US" sz="1300" b="1" dirty="0">
-                <a:solidFill>
-                  <a:srgbClr val="FFFFFF"/>
-                </a:solidFill>
-                <a:latin typeface="Meiryo" pitchFamily="34" charset="0"/>
-                <a:ea typeface="Meiryo" pitchFamily="34" charset="-122"/>
-                <a:cs typeface="Meiryo" pitchFamily="34" charset="-120"/>
-              </a:rPr>
-              <a:t>ローカル直接でOK</a:t>
-            </a:r>
-            <a:endParaRPr lang="en-US" sz="1300" dirty="0"/>
-          </a:p>
-          <a:p>
-            <a:pPr marL="0" indent="0" algn="ctr">
-              <a:buNone/>
-            </a:pPr>
-            <a:r>
-              <a:rPr lang="en-US" sz="1000" dirty="0">
-                <a:solidFill>
-                  <a:srgbClr val="FFFFFF"/>
-                </a:solidFill>
-                <a:latin typeface="Meiryo" pitchFamily="34" charset="0"/>
-                <a:ea typeface="Meiryo" pitchFamily="34" charset="-122"/>
-                <a:cs typeface="Meiryo" pitchFamily="34" charset="-120"/>
-              </a:rPr>
-              <a:t>+ 第3回の3点セット</a:t>
-            </a:r>
-            <a:endParaRPr lang="en-US" sz="1300" dirty="0"/>
-          </a:p>
-        </p:txBody>
-      </p:sp>
-      <p:sp>
-        <p:nvSpPr>
-          <p:cNvPr id="27" name="Shape 25"/>
-          <p:cNvSpPr/>
-          <p:nvPr/>
-        </p:nvSpPr>
-        <p:spPr>
-          <a:xfrm>
-            <a:off x="457200" y="4754880"/>
-            <a:ext cx="8229600" cy="365760"/>
-          </a:xfrm>
-          <a:prstGeom prst="rect">
-            <a:avLst/>
-          </a:prstGeom>
-          <a:solidFill>
-            <a:srgbClr val="151B47"/>
-          </a:solidFill>
-          <a:ln w="12700">
-            <a:solidFill>
-              <a:srgbClr val="151B47"/>
-            </a:solidFill>
-            <a:prstDash val="solid"/>
-          </a:ln>
-        </p:spPr>
-      </p:sp>
-      <p:sp>
-        <p:nvSpPr>
-          <p:cNvPr id="28" name="Text 26"/>
-          <p:cNvSpPr/>
-          <p:nvPr/>
-        </p:nvSpPr>
-        <p:spPr>
-          <a:xfrm>
-            <a:off x="594360" y="4754880"/>
-            <a:ext cx="7955280" cy="365760"/>
-          </a:xfrm>
-          <a:prstGeom prst="rect">
-            <a:avLst/>
-          </a:prstGeom>
-          <a:noFill/>
-          <a:ln/>
-        </p:spPr>
-        <p:txBody>
-          <a:bodyPr wrap="square" lIns="0" tIns="0" rIns="0" bIns="0" rtlCol="0" anchor="ctr"/>
-          <a:lstStyle/>
-          <a:p>
-            <a:pPr marL="0" indent="0">
-              <a:buNone/>
-            </a:pPr>
-            <a:r>
-              <a:rPr lang="en-US" sz="1200" dirty="0">
-                <a:solidFill>
-                  <a:srgbClr val="FFFFFF"/>
-                </a:solidFill>
-                <a:latin typeface="Meiryo" pitchFamily="34" charset="0"/>
-                <a:ea typeface="Meiryo" pitchFamily="34" charset="-122"/>
-                <a:cs typeface="Meiryo" pitchFamily="34" charset="-120"/>
-              </a:rPr>
-              <a:t>💡 </a:t>
-            </a:r>
-            <a:r>
-              <a:rPr lang="en-US" sz="1100" b="1" dirty="0">
-                <a:solidFill>
-                  <a:srgbClr val="FFFFFF"/>
-                </a:solidFill>
-                <a:latin typeface="Meiryo" pitchFamily="34" charset="0"/>
-                <a:ea typeface="Meiryo" pitchFamily="34" charset="-122"/>
-                <a:cs typeface="Meiryo" pitchFamily="34" charset="-120"/>
-              </a:rPr>
-              <a:t>迷ったら DevContainer</a:t>
-            </a:r>
-            <a:r>
-              <a:rPr lang="en-US" sz="1100" dirty="0">
-                <a:solidFill>
-                  <a:srgbClr val="CADCFC"/>
-                </a:solidFill>
-                <a:latin typeface="Meiryo" pitchFamily="34" charset="0"/>
-                <a:ea typeface="Meiryo" pitchFamily="34" charset="-122"/>
-                <a:cs typeface="Meiryo" pitchFamily="34" charset="-120"/>
-              </a:rPr>
-              <a:t>。そこから、必要に応じてスケールアップ or ダウンするのが実用的</a:t>
             </a:r>
             <a:endParaRPr lang="en-US" sz="1100" dirty="0"/>
           </a:p>
